--- a/docs/律瞳-LegalLens-产品介绍.pptx
+++ b/docs/律瞳-LegalLens-产品介绍.pptx
@@ -19,6 +19,8 @@
     <p:sldId id="267" r:id="rId18"/>
     <p:sldId id="268" r:id="rId19"/>
     <p:sldId id="269" r:id="rId20"/>
+    <p:sldId id="270" r:id="rId21"/>
+    <p:sldId id="271" r:id="rId22"/>
   </p:sldIdLst>
   <p:sldSz cx="12188952" cy="6858000" type="screen4x3"/>
   <p:notesSz cx="6858000" cy="9144000"/>
@@ -3462,7 +3464,7 @@
                 </a:solidFill>
                 <a:latin typeface="Calibri"/>
               </a:rPr>
-              <a:t>10 / 14</a:t>
+              <a:t>10 / 16</a:t>
             </a:r>
           </a:p>
         </p:txBody>
@@ -4334,7 +4336,7 @@
                 </a:solidFill>
                 <a:latin typeface="Calibri"/>
               </a:rPr>
-              <a:t>11 / 14</a:t>
+              <a:t>11 / 16</a:t>
             </a:r>
           </a:p>
         </p:txBody>
@@ -4600,7 +4602,7 @@
                 </a:solidFill>
                 <a:latin typeface="Calibri"/>
               </a:rPr>
-              <a:t>12 / 14</a:t>
+              <a:t>12 / 16</a:t>
             </a:r>
           </a:p>
         </p:txBody>
@@ -4866,7 +4868,7 @@
                 </a:solidFill>
                 <a:latin typeface="Calibri"/>
               </a:rPr>
-              <a:t>13 / 14</a:t>
+              <a:t>13 / 16</a:t>
             </a:r>
           </a:p>
         </p:txBody>
@@ -6028,6 +6030,2594 @@
         <p:spPr>
           <a:xfrm>
             <a:off x="0" y="0"/>
+            <a:ext cx="12188952" cy="411480"/>
+          </a:xfrm>
+          <a:prstGeom prst="rect">
+            <a:avLst/>
+          </a:prstGeom>
+          <a:solidFill>
+            <a:srgbClr val="0C4A3E"/>
+          </a:solidFill>
+          <a:ln>
+            <a:noFill/>
+          </a:ln>
+          <a:effectLst/>
+        </p:spPr>
+        <p:style>
+          <a:lnRef idx="1">
+            <a:schemeClr val="accent1"/>
+          </a:lnRef>
+          <a:fillRef idx="3">
+            <a:schemeClr val="accent1"/>
+          </a:fillRef>
+          <a:effectRef idx="2">
+            <a:schemeClr val="accent1"/>
+          </a:effectRef>
+          <a:fontRef idx="minor">
+            <a:schemeClr val="lt1"/>
+          </a:fontRef>
+        </p:style>
+        <p:txBody>
+          <a:bodyPr rtlCol="0" anchor="ctr"/>
+          <a:lstStyle/>
+          <a:p>
+            <a:pPr algn="ctr"/>
+          </a:p>
+        </p:txBody>
+      </p:sp>
+      <p:sp>
+        <p:nvSpPr>
+          <p:cNvPr id="3" name="TextBox 2"/>
+          <p:cNvSpPr txBox="1"/>
+          <p:nvPr/>
+        </p:nvSpPr>
+        <p:spPr>
+          <a:xfrm>
+            <a:off x="457200" y="45720"/>
+            <a:ext cx="7315200" cy="365760"/>
+          </a:xfrm>
+          <a:prstGeom prst="rect">
+            <a:avLst/>
+          </a:prstGeom>
+          <a:noFill/>
+        </p:spPr>
+        <p:txBody>
+          <a:bodyPr wrap="square" anchor="ctr">
+            <a:spAutoFit/>
+          </a:bodyPr>
+          <a:lstStyle/>
+          <a:p>
+            <a:pPr algn="l"/>
+            <a:r>
+              <a:rPr sz="1100" b="0">
+                <a:rFonts a:eastAsia="Microsoft YaHei" a:ascii="Microsoft YaHei" a:hAnsi="Microsoft YaHei"/>
+                <a:solidFill>
+                  <a:srgbClr val="FFFFFF"/>
+                </a:solidFill>
+                <a:latin typeface="Microsoft YaHei"/>
+              </a:rPr>
+              <a:t>律瞳 LegalLens · 产品介绍</a:t>
+            </a:r>
+          </a:p>
+        </p:txBody>
+      </p:sp>
+      <p:sp>
+        <p:nvSpPr>
+          <p:cNvPr id="4" name="TextBox 3"/>
+          <p:cNvSpPr txBox="1"/>
+          <p:nvPr/>
+        </p:nvSpPr>
+        <p:spPr>
+          <a:xfrm>
+            <a:off x="10058400" y="45720"/>
+            <a:ext cx="1828800" cy="365760"/>
+          </a:xfrm>
+          <a:prstGeom prst="rect">
+            <a:avLst/>
+          </a:prstGeom>
+          <a:noFill/>
+        </p:spPr>
+        <p:txBody>
+          <a:bodyPr wrap="square" anchor="ctr">
+            <a:spAutoFit/>
+          </a:bodyPr>
+          <a:lstStyle/>
+          <a:p>
+            <a:pPr algn="r"/>
+            <a:r>
+              <a:rPr sz="1000" b="0">
+                <a:rFonts a:eastAsia="Calibri" a:ascii="Calibri" a:hAnsi="Calibri"/>
+                <a:solidFill>
+                  <a:srgbClr val="FFFFFF"/>
+                </a:solidFill>
+                <a:latin typeface="Calibri"/>
+              </a:rPr>
+              <a:t>14 / 16</a:t>
+            </a:r>
+          </a:p>
+        </p:txBody>
+      </p:sp>
+      <p:sp>
+        <p:nvSpPr>
+          <p:cNvPr id="5" name="TextBox 4"/>
+          <p:cNvSpPr txBox="1"/>
+          <p:nvPr/>
+        </p:nvSpPr>
+        <p:spPr>
+          <a:xfrm>
+            <a:off x="457200" y="640080"/>
+            <a:ext cx="10972800" cy="548640"/>
+          </a:xfrm>
+          <a:prstGeom prst="rect">
+            <a:avLst/>
+          </a:prstGeom>
+          <a:noFill/>
+        </p:spPr>
+        <p:txBody>
+          <a:bodyPr wrap="square" anchor="t">
+            <a:spAutoFit/>
+          </a:bodyPr>
+          <a:lstStyle/>
+          <a:p>
+            <a:pPr algn="l"/>
+            <a:r>
+              <a:rPr sz="2800" b="1">
+                <a:rFonts a:eastAsia="Microsoft YaHei" a:ascii="Microsoft YaHei" a:hAnsi="Microsoft YaHei"/>
+                <a:solidFill>
+                  <a:srgbClr val="0C4A3E"/>
+                </a:solidFill>
+                <a:latin typeface="Microsoft YaHei"/>
+              </a:rPr>
+              <a:t>07 合规边界 / Compliance &amp; Boundaries</a:t>
+            </a:r>
+          </a:p>
+        </p:txBody>
+      </p:sp>
+      <p:sp>
+        <p:nvSpPr>
+          <p:cNvPr id="6" name="TextBox 5"/>
+          <p:cNvSpPr txBox="1"/>
+          <p:nvPr/>
+        </p:nvSpPr>
+        <p:spPr>
+          <a:xfrm>
+            <a:off x="457200" y="1280160"/>
+            <a:ext cx="10972800" cy="365760"/>
+          </a:xfrm>
+          <a:prstGeom prst="rect">
+            <a:avLst/>
+          </a:prstGeom>
+          <a:noFill/>
+        </p:spPr>
+        <p:txBody>
+          <a:bodyPr wrap="square" anchor="t">
+            <a:spAutoFit/>
+          </a:bodyPr>
+          <a:lstStyle/>
+          <a:p>
+            <a:pPr algn="l"/>
+            <a:r>
+              <a:rPr sz="1200" b="0">
+                <a:rFonts a:eastAsia="Microsoft YaHei" a:ascii="Microsoft YaHei" a:hAnsi="Microsoft YaHei"/>
+                <a:solidFill>
+                  <a:srgbClr val="78716C"/>
+                </a:solidFill>
+                <a:latin typeface="Microsoft YaHei"/>
+              </a:rPr>
+              <a:t>律瞳严格遵守《生成式人工智能服务管理暂行办法》及数据安全相关法规</a:t>
+            </a:r>
+          </a:p>
+        </p:txBody>
+      </p:sp>
+      <p:sp>
+        <p:nvSpPr>
+          <p:cNvPr id="7" name="Rectangle 6"/>
+          <p:cNvSpPr/>
+          <p:nvPr/>
+        </p:nvSpPr>
+        <p:spPr>
+          <a:xfrm>
+            <a:off x="457200" y="1828800"/>
+            <a:ext cx="5486400" cy="2103120"/>
+          </a:xfrm>
+          <a:prstGeom prst="rect">
+            <a:avLst/>
+          </a:prstGeom>
+          <a:solidFill>
+            <a:srgbClr val="F5F5F4"/>
+          </a:solidFill>
+          <a:ln>
+            <a:noFill/>
+          </a:ln>
+          <a:effectLst/>
+        </p:spPr>
+        <p:style>
+          <a:lnRef idx="1">
+            <a:schemeClr val="accent1"/>
+          </a:lnRef>
+          <a:fillRef idx="3">
+            <a:schemeClr val="accent1"/>
+          </a:fillRef>
+          <a:effectRef idx="2">
+            <a:schemeClr val="accent1"/>
+          </a:effectRef>
+          <a:fontRef idx="minor">
+            <a:schemeClr val="lt1"/>
+          </a:fontRef>
+        </p:style>
+        <p:txBody>
+          <a:bodyPr rtlCol="0" anchor="ctr"/>
+          <a:lstStyle/>
+          <a:p>
+            <a:pPr algn="ctr"/>
+          </a:p>
+        </p:txBody>
+      </p:sp>
+      <p:sp>
+        <p:nvSpPr>
+          <p:cNvPr id="8" name="Rectangle 7"/>
+          <p:cNvSpPr/>
+          <p:nvPr/>
+        </p:nvSpPr>
+        <p:spPr>
+          <a:xfrm>
+            <a:off x="457200" y="1828800"/>
+            <a:ext cx="91440" cy="2103120"/>
+          </a:xfrm>
+          <a:prstGeom prst="rect">
+            <a:avLst/>
+          </a:prstGeom>
+          <a:solidFill>
+            <a:srgbClr val="0C4A3E"/>
+          </a:solidFill>
+          <a:ln>
+            <a:noFill/>
+          </a:ln>
+          <a:effectLst/>
+        </p:spPr>
+        <p:style>
+          <a:lnRef idx="1">
+            <a:schemeClr val="accent1"/>
+          </a:lnRef>
+          <a:fillRef idx="3">
+            <a:schemeClr val="accent1"/>
+          </a:fillRef>
+          <a:effectRef idx="2">
+            <a:schemeClr val="accent1"/>
+          </a:effectRef>
+          <a:fontRef idx="minor">
+            <a:schemeClr val="lt1"/>
+          </a:fontRef>
+        </p:style>
+        <p:txBody>
+          <a:bodyPr rtlCol="0" anchor="ctr"/>
+          <a:lstStyle/>
+          <a:p>
+            <a:pPr algn="ctr"/>
+          </a:p>
+        </p:txBody>
+      </p:sp>
+      <p:sp>
+        <p:nvSpPr>
+          <p:cNvPr id="9" name="TextBox 8"/>
+          <p:cNvSpPr txBox="1"/>
+          <p:nvPr/>
+        </p:nvSpPr>
+        <p:spPr>
+          <a:xfrm>
+            <a:off x="731520" y="1965960"/>
+            <a:ext cx="640080" cy="457200"/>
+          </a:xfrm>
+          <a:prstGeom prst="rect">
+            <a:avLst/>
+          </a:prstGeom>
+          <a:noFill/>
+        </p:spPr>
+        <p:txBody>
+          <a:bodyPr wrap="square" anchor="ctr">
+            <a:spAutoFit/>
+          </a:bodyPr>
+          <a:lstStyle/>
+          <a:p>
+            <a:pPr algn="l"/>
+            <a:r>
+              <a:rPr sz="2800" b="0">
+                <a:rFonts a:eastAsia="Microsoft YaHei" a:ascii="Microsoft YaHei" a:hAnsi="Microsoft YaHei"/>
+                <a:solidFill>
+                  <a:srgbClr val="1C1917"/>
+                </a:solidFill>
+                <a:latin typeface="Microsoft YaHei"/>
+              </a:rPr>
+              <a:t>📋</a:t>
+            </a:r>
+          </a:p>
+        </p:txBody>
+      </p:sp>
+      <p:sp>
+        <p:nvSpPr>
+          <p:cNvPr id="10" name="TextBox 9"/>
+          <p:cNvSpPr txBox="1"/>
+          <p:nvPr/>
+        </p:nvSpPr>
+        <p:spPr>
+          <a:xfrm>
+            <a:off x="1371600" y="1965960"/>
+            <a:ext cx="4114800" cy="365760"/>
+          </a:xfrm>
+          <a:prstGeom prst="rect">
+            <a:avLst/>
+          </a:prstGeom>
+          <a:noFill/>
+        </p:spPr>
+        <p:txBody>
+          <a:bodyPr wrap="square" anchor="t">
+            <a:spAutoFit/>
+          </a:bodyPr>
+          <a:lstStyle/>
+          <a:p>
+            <a:pPr algn="l"/>
+            <a:r>
+              <a:rPr sz="1800" b="1">
+                <a:rFonts a:eastAsia="Microsoft YaHei" a:ascii="Microsoft YaHei" a:hAnsi="Microsoft YaHei"/>
+                <a:solidFill>
+                  <a:srgbClr val="1C1917"/>
+                </a:solidFill>
+                <a:latin typeface="Microsoft YaHei"/>
+              </a:rPr>
+              <a:t>算法备案</a:t>
+            </a:r>
+          </a:p>
+        </p:txBody>
+      </p:sp>
+      <p:sp>
+        <p:nvSpPr>
+          <p:cNvPr id="11" name="TextBox 10"/>
+          <p:cNvSpPr txBox="1"/>
+          <p:nvPr/>
+        </p:nvSpPr>
+        <p:spPr>
+          <a:xfrm>
+            <a:off x="1371600" y="2331720"/>
+            <a:ext cx="4114800" cy="274320"/>
+          </a:xfrm>
+          <a:prstGeom prst="rect">
+            <a:avLst/>
+          </a:prstGeom>
+          <a:noFill/>
+        </p:spPr>
+        <p:txBody>
+          <a:bodyPr wrap="square" anchor="t">
+            <a:spAutoFit/>
+          </a:bodyPr>
+          <a:lstStyle/>
+          <a:p>
+            <a:pPr algn="l"/>
+            <a:r>
+              <a:rPr sz="1000" b="0">
+                <a:rFonts a:eastAsia="Calibri" a:ascii="Calibri" a:hAnsi="Calibri"/>
+                <a:solidFill>
+                  <a:srgbClr val="78716C"/>
+                </a:solidFill>
+                <a:latin typeface="Calibri"/>
+              </a:rPr>
+              <a:t>Algorithm Filing</a:t>
+            </a:r>
+          </a:p>
+        </p:txBody>
+      </p:sp>
+      <p:sp>
+        <p:nvSpPr>
+          <p:cNvPr id="12" name="TextBox 11"/>
+          <p:cNvSpPr txBox="1"/>
+          <p:nvPr/>
+        </p:nvSpPr>
+        <p:spPr>
+          <a:xfrm>
+            <a:off x="731520" y="2743200"/>
+            <a:ext cx="4937760" cy="1097280"/>
+          </a:xfrm>
+          <a:prstGeom prst="rect">
+            <a:avLst/>
+          </a:prstGeom>
+          <a:noFill/>
+        </p:spPr>
+        <p:txBody>
+          <a:bodyPr wrap="square" anchor="t">
+            <a:spAutoFit/>
+          </a:bodyPr>
+          <a:lstStyle/>
+          <a:p>
+            <a:pPr algn="l"/>
+            <a:r>
+              <a:rPr sz="1200" b="0">
+                <a:rFonts a:eastAsia="Microsoft YaHei" a:ascii="Microsoft YaHei" a:hAnsi="Microsoft YaHei"/>
+                <a:solidFill>
+                  <a:srgbClr val="44403C"/>
+                </a:solidFill>
+                <a:latin typeface="Microsoft YaHei"/>
+              </a:rPr>
+              <a:t>已完成生成式 AI 备案自评估报告
+含算法原理、数据来源、安全措施
+可在监管平台查询备案状态</a:t>
+            </a:r>
+          </a:p>
+        </p:txBody>
+      </p:sp>
+      <p:sp>
+        <p:nvSpPr>
+          <p:cNvPr id="13" name="Rectangle 12"/>
+          <p:cNvSpPr/>
+          <p:nvPr/>
+        </p:nvSpPr>
+        <p:spPr>
+          <a:xfrm>
+            <a:off x="6217920" y="1828800"/>
+            <a:ext cx="5486400" cy="2103120"/>
+          </a:xfrm>
+          <a:prstGeom prst="rect">
+            <a:avLst/>
+          </a:prstGeom>
+          <a:solidFill>
+            <a:srgbClr val="F5F5F4"/>
+          </a:solidFill>
+          <a:ln>
+            <a:noFill/>
+          </a:ln>
+          <a:effectLst/>
+        </p:spPr>
+        <p:style>
+          <a:lnRef idx="1">
+            <a:schemeClr val="accent1"/>
+          </a:lnRef>
+          <a:fillRef idx="3">
+            <a:schemeClr val="accent1"/>
+          </a:fillRef>
+          <a:effectRef idx="2">
+            <a:schemeClr val="accent1"/>
+          </a:effectRef>
+          <a:fontRef idx="minor">
+            <a:schemeClr val="lt1"/>
+          </a:fontRef>
+        </p:style>
+        <p:txBody>
+          <a:bodyPr rtlCol="0" anchor="ctr"/>
+          <a:lstStyle/>
+          <a:p>
+            <a:pPr algn="ctr"/>
+          </a:p>
+        </p:txBody>
+      </p:sp>
+      <p:sp>
+        <p:nvSpPr>
+          <p:cNvPr id="14" name="Rectangle 13"/>
+          <p:cNvSpPr/>
+          <p:nvPr/>
+        </p:nvSpPr>
+        <p:spPr>
+          <a:xfrm>
+            <a:off x="6217920" y="1828800"/>
+            <a:ext cx="91440" cy="2103120"/>
+          </a:xfrm>
+          <a:prstGeom prst="rect">
+            <a:avLst/>
+          </a:prstGeom>
+          <a:solidFill>
+            <a:srgbClr val="D97706"/>
+          </a:solidFill>
+          <a:ln>
+            <a:noFill/>
+          </a:ln>
+          <a:effectLst/>
+        </p:spPr>
+        <p:style>
+          <a:lnRef idx="1">
+            <a:schemeClr val="accent1"/>
+          </a:lnRef>
+          <a:fillRef idx="3">
+            <a:schemeClr val="accent1"/>
+          </a:fillRef>
+          <a:effectRef idx="2">
+            <a:schemeClr val="accent1"/>
+          </a:effectRef>
+          <a:fontRef idx="minor">
+            <a:schemeClr val="lt1"/>
+          </a:fontRef>
+        </p:style>
+        <p:txBody>
+          <a:bodyPr rtlCol="0" anchor="ctr"/>
+          <a:lstStyle/>
+          <a:p>
+            <a:pPr algn="ctr"/>
+          </a:p>
+        </p:txBody>
+      </p:sp>
+      <p:sp>
+        <p:nvSpPr>
+          <p:cNvPr id="15" name="TextBox 14"/>
+          <p:cNvSpPr txBox="1"/>
+          <p:nvPr/>
+        </p:nvSpPr>
+        <p:spPr>
+          <a:xfrm>
+            <a:off x="6492240" y="1965960"/>
+            <a:ext cx="640080" cy="457200"/>
+          </a:xfrm>
+          <a:prstGeom prst="rect">
+            <a:avLst/>
+          </a:prstGeom>
+          <a:noFill/>
+        </p:spPr>
+        <p:txBody>
+          <a:bodyPr wrap="square" anchor="ctr">
+            <a:spAutoFit/>
+          </a:bodyPr>
+          <a:lstStyle/>
+          <a:p>
+            <a:pPr algn="l"/>
+            <a:r>
+              <a:rPr sz="2800" b="0">
+                <a:rFonts a:eastAsia="Microsoft YaHei" a:ascii="Microsoft YaHei" a:hAnsi="Microsoft YaHei"/>
+                <a:solidFill>
+                  <a:srgbClr val="1C1917"/>
+                </a:solidFill>
+                <a:latin typeface="Microsoft YaHei"/>
+              </a:rPr>
+              <a:t>🔐</a:t>
+            </a:r>
+          </a:p>
+        </p:txBody>
+      </p:sp>
+      <p:sp>
+        <p:nvSpPr>
+          <p:cNvPr id="16" name="TextBox 15"/>
+          <p:cNvSpPr txBox="1"/>
+          <p:nvPr/>
+        </p:nvSpPr>
+        <p:spPr>
+          <a:xfrm>
+            <a:off x="7132320" y="1965960"/>
+            <a:ext cx="4114800" cy="365760"/>
+          </a:xfrm>
+          <a:prstGeom prst="rect">
+            <a:avLst/>
+          </a:prstGeom>
+          <a:noFill/>
+        </p:spPr>
+        <p:txBody>
+          <a:bodyPr wrap="square" anchor="t">
+            <a:spAutoFit/>
+          </a:bodyPr>
+          <a:lstStyle/>
+          <a:p>
+            <a:pPr algn="l"/>
+            <a:r>
+              <a:rPr sz="1800" b="1">
+                <a:rFonts a:eastAsia="Microsoft YaHei" a:ascii="Microsoft YaHei" a:hAnsi="Microsoft YaHei"/>
+                <a:solidFill>
+                  <a:srgbClr val="1C1917"/>
+                </a:solidFill>
+                <a:latin typeface="Microsoft YaHei"/>
+              </a:rPr>
+              <a:t>数据安全</a:t>
+            </a:r>
+          </a:p>
+        </p:txBody>
+      </p:sp>
+      <p:sp>
+        <p:nvSpPr>
+          <p:cNvPr id="17" name="TextBox 16"/>
+          <p:cNvSpPr txBox="1"/>
+          <p:nvPr/>
+        </p:nvSpPr>
+        <p:spPr>
+          <a:xfrm>
+            <a:off x="7132320" y="2331720"/>
+            <a:ext cx="4114800" cy="274320"/>
+          </a:xfrm>
+          <a:prstGeom prst="rect">
+            <a:avLst/>
+          </a:prstGeom>
+          <a:noFill/>
+        </p:spPr>
+        <p:txBody>
+          <a:bodyPr wrap="square" anchor="t">
+            <a:spAutoFit/>
+          </a:bodyPr>
+          <a:lstStyle/>
+          <a:p>
+            <a:pPr algn="l"/>
+            <a:r>
+              <a:rPr sz="1000" b="0">
+                <a:rFonts a:eastAsia="Calibri" a:ascii="Calibri" a:hAnsi="Calibri"/>
+                <a:solidFill>
+                  <a:srgbClr val="78716C"/>
+                </a:solidFill>
+                <a:latin typeface="Calibri"/>
+              </a:rPr>
+              <a:t>Data Security</a:t>
+            </a:r>
+          </a:p>
+        </p:txBody>
+      </p:sp>
+      <p:sp>
+        <p:nvSpPr>
+          <p:cNvPr id="18" name="TextBox 17"/>
+          <p:cNvSpPr txBox="1"/>
+          <p:nvPr/>
+        </p:nvSpPr>
+        <p:spPr>
+          <a:xfrm>
+            <a:off x="6492240" y="2743200"/>
+            <a:ext cx="4937760" cy="1097280"/>
+          </a:xfrm>
+          <a:prstGeom prst="rect">
+            <a:avLst/>
+          </a:prstGeom>
+          <a:noFill/>
+        </p:spPr>
+        <p:txBody>
+          <a:bodyPr wrap="square" anchor="t">
+            <a:spAutoFit/>
+          </a:bodyPr>
+          <a:lstStyle/>
+          <a:p>
+            <a:pPr algn="l"/>
+            <a:r>
+              <a:rPr sz="1200" b="0">
+                <a:rFonts a:eastAsia="Microsoft YaHei" a:ascii="Microsoft YaHei" a:hAnsi="Microsoft YaHei"/>
+                <a:solidFill>
+                  <a:srgbClr val="44403C"/>
+                </a:solidFill>
+                <a:latin typeface="Microsoft YaHei"/>
+              </a:rPr>
+              <a:t>用户密码 bcrypt 加密
+JWT Token HS256 签名
+HTTPS 全程加密传输</a:t>
+            </a:r>
+          </a:p>
+        </p:txBody>
+      </p:sp>
+      <p:sp>
+        <p:nvSpPr>
+          <p:cNvPr id="19" name="Rectangle 18"/>
+          <p:cNvSpPr/>
+          <p:nvPr/>
+        </p:nvSpPr>
+        <p:spPr>
+          <a:xfrm>
+            <a:off x="457200" y="4206240"/>
+            <a:ext cx="5486400" cy="2103120"/>
+          </a:xfrm>
+          <a:prstGeom prst="rect">
+            <a:avLst/>
+          </a:prstGeom>
+          <a:solidFill>
+            <a:srgbClr val="F5F5F4"/>
+          </a:solidFill>
+          <a:ln>
+            <a:noFill/>
+          </a:ln>
+          <a:effectLst/>
+        </p:spPr>
+        <p:style>
+          <a:lnRef idx="1">
+            <a:schemeClr val="accent1"/>
+          </a:lnRef>
+          <a:fillRef idx="3">
+            <a:schemeClr val="accent1"/>
+          </a:fillRef>
+          <a:effectRef idx="2">
+            <a:schemeClr val="accent1"/>
+          </a:effectRef>
+          <a:fontRef idx="minor">
+            <a:schemeClr val="lt1"/>
+          </a:fontRef>
+        </p:style>
+        <p:txBody>
+          <a:bodyPr rtlCol="0" anchor="ctr"/>
+          <a:lstStyle/>
+          <a:p>
+            <a:pPr algn="ctr"/>
+          </a:p>
+        </p:txBody>
+      </p:sp>
+      <p:sp>
+        <p:nvSpPr>
+          <p:cNvPr id="20" name="Rectangle 19"/>
+          <p:cNvSpPr/>
+          <p:nvPr/>
+        </p:nvSpPr>
+        <p:spPr>
+          <a:xfrm>
+            <a:off x="457200" y="4206240"/>
+            <a:ext cx="91440" cy="2103120"/>
+          </a:xfrm>
+          <a:prstGeom prst="rect">
+            <a:avLst/>
+          </a:prstGeom>
+          <a:solidFill>
+            <a:srgbClr val="0C4A3E"/>
+          </a:solidFill>
+          <a:ln>
+            <a:noFill/>
+          </a:ln>
+          <a:effectLst/>
+        </p:spPr>
+        <p:style>
+          <a:lnRef idx="1">
+            <a:schemeClr val="accent1"/>
+          </a:lnRef>
+          <a:fillRef idx="3">
+            <a:schemeClr val="accent1"/>
+          </a:fillRef>
+          <a:effectRef idx="2">
+            <a:schemeClr val="accent1"/>
+          </a:effectRef>
+          <a:fontRef idx="minor">
+            <a:schemeClr val="lt1"/>
+          </a:fontRef>
+        </p:style>
+        <p:txBody>
+          <a:bodyPr rtlCol="0" anchor="ctr"/>
+          <a:lstStyle/>
+          <a:p>
+            <a:pPr algn="ctr"/>
+          </a:p>
+        </p:txBody>
+      </p:sp>
+      <p:sp>
+        <p:nvSpPr>
+          <p:cNvPr id="21" name="TextBox 20"/>
+          <p:cNvSpPr txBox="1"/>
+          <p:nvPr/>
+        </p:nvSpPr>
+        <p:spPr>
+          <a:xfrm>
+            <a:off x="731520" y="4343400"/>
+            <a:ext cx="640080" cy="457200"/>
+          </a:xfrm>
+          <a:prstGeom prst="rect">
+            <a:avLst/>
+          </a:prstGeom>
+          <a:noFill/>
+        </p:spPr>
+        <p:txBody>
+          <a:bodyPr wrap="square" anchor="ctr">
+            <a:spAutoFit/>
+          </a:bodyPr>
+          <a:lstStyle/>
+          <a:p>
+            <a:pPr algn="l"/>
+            <a:r>
+              <a:rPr sz="2800" b="0">
+                <a:rFonts a:eastAsia="Microsoft YaHei" a:ascii="Microsoft YaHei" a:hAnsi="Microsoft YaHei"/>
+                <a:solidFill>
+                  <a:srgbClr val="1C1917"/>
+                </a:solidFill>
+                <a:latin typeface="Microsoft YaHei"/>
+              </a:rPr>
+              <a:t>📜</a:t>
+            </a:r>
+          </a:p>
+        </p:txBody>
+      </p:sp>
+      <p:sp>
+        <p:nvSpPr>
+          <p:cNvPr id="22" name="TextBox 21"/>
+          <p:cNvSpPr txBox="1"/>
+          <p:nvPr/>
+        </p:nvSpPr>
+        <p:spPr>
+          <a:xfrm>
+            <a:off x="1371600" y="4343400"/>
+            <a:ext cx="4114800" cy="365760"/>
+          </a:xfrm>
+          <a:prstGeom prst="rect">
+            <a:avLst/>
+          </a:prstGeom>
+          <a:noFill/>
+        </p:spPr>
+        <p:txBody>
+          <a:bodyPr wrap="square" anchor="t">
+            <a:spAutoFit/>
+          </a:bodyPr>
+          <a:lstStyle/>
+          <a:p>
+            <a:pPr algn="l"/>
+            <a:r>
+              <a:rPr sz="1800" b="1">
+                <a:rFonts a:eastAsia="Microsoft YaHei" a:ascii="Microsoft YaHei" a:hAnsi="Microsoft YaHei"/>
+                <a:solidFill>
+                  <a:srgbClr val="1C1917"/>
+                </a:solidFill>
+                <a:latin typeface="Microsoft YaHei"/>
+              </a:rPr>
+              <a:t>合规文档</a:t>
+            </a:r>
+          </a:p>
+        </p:txBody>
+      </p:sp>
+      <p:sp>
+        <p:nvSpPr>
+          <p:cNvPr id="23" name="TextBox 22"/>
+          <p:cNvSpPr txBox="1"/>
+          <p:nvPr/>
+        </p:nvSpPr>
+        <p:spPr>
+          <a:xfrm>
+            <a:off x="1371600" y="4709159"/>
+            <a:ext cx="4114800" cy="274320"/>
+          </a:xfrm>
+          <a:prstGeom prst="rect">
+            <a:avLst/>
+          </a:prstGeom>
+          <a:noFill/>
+        </p:spPr>
+        <p:txBody>
+          <a:bodyPr wrap="square" anchor="t">
+            <a:spAutoFit/>
+          </a:bodyPr>
+          <a:lstStyle/>
+          <a:p>
+            <a:pPr algn="l"/>
+            <a:r>
+              <a:rPr sz="1000" b="0">
+                <a:rFonts a:eastAsia="Calibri" a:ascii="Calibri" a:hAnsi="Calibri"/>
+                <a:solidFill>
+                  <a:srgbClr val="78716C"/>
+                </a:solidFill>
+                <a:latin typeface="Calibri"/>
+              </a:rPr>
+              <a:t>Legal Documents</a:t>
+            </a:r>
+          </a:p>
+        </p:txBody>
+      </p:sp>
+      <p:sp>
+        <p:nvSpPr>
+          <p:cNvPr id="24" name="TextBox 23"/>
+          <p:cNvSpPr txBox="1"/>
+          <p:nvPr/>
+        </p:nvSpPr>
+        <p:spPr>
+          <a:xfrm>
+            <a:off x="731520" y="5120640"/>
+            <a:ext cx="4937760" cy="1097280"/>
+          </a:xfrm>
+          <a:prstGeom prst="rect">
+            <a:avLst/>
+          </a:prstGeom>
+          <a:noFill/>
+        </p:spPr>
+        <p:txBody>
+          <a:bodyPr wrap="square" anchor="t">
+            <a:spAutoFit/>
+          </a:bodyPr>
+          <a:lstStyle/>
+          <a:p>
+            <a:pPr algn="l"/>
+            <a:r>
+              <a:rPr sz="1200" b="0">
+                <a:rFonts a:eastAsia="Microsoft YaHei" a:ascii="Microsoft YaHei" a:hAnsi="Microsoft YaHei"/>
+                <a:solidFill>
+                  <a:srgbClr val="44403C"/>
+                </a:solidFill>
+                <a:latin typeface="Microsoft YaHei"/>
+              </a:rPr>
+              <a:t>用户服务协议 · 隐私政策
+法律免责声明 · 数据来源说明
+7 份完整合规材料已就位</a:t>
+            </a:r>
+          </a:p>
+        </p:txBody>
+      </p:sp>
+      <p:sp>
+        <p:nvSpPr>
+          <p:cNvPr id="25" name="Rectangle 24"/>
+          <p:cNvSpPr/>
+          <p:nvPr/>
+        </p:nvSpPr>
+        <p:spPr>
+          <a:xfrm>
+            <a:off x="6217920" y="4206240"/>
+            <a:ext cx="5486400" cy="2103120"/>
+          </a:xfrm>
+          <a:prstGeom prst="rect">
+            <a:avLst/>
+          </a:prstGeom>
+          <a:solidFill>
+            <a:srgbClr val="F5F5F4"/>
+          </a:solidFill>
+          <a:ln>
+            <a:noFill/>
+          </a:ln>
+          <a:effectLst/>
+        </p:spPr>
+        <p:style>
+          <a:lnRef idx="1">
+            <a:schemeClr val="accent1"/>
+          </a:lnRef>
+          <a:fillRef idx="3">
+            <a:schemeClr val="accent1"/>
+          </a:fillRef>
+          <a:effectRef idx="2">
+            <a:schemeClr val="accent1"/>
+          </a:effectRef>
+          <a:fontRef idx="minor">
+            <a:schemeClr val="lt1"/>
+          </a:fontRef>
+        </p:style>
+        <p:txBody>
+          <a:bodyPr rtlCol="0" anchor="ctr"/>
+          <a:lstStyle/>
+          <a:p>
+            <a:pPr algn="ctr"/>
+          </a:p>
+        </p:txBody>
+      </p:sp>
+      <p:sp>
+        <p:nvSpPr>
+          <p:cNvPr id="26" name="Rectangle 25"/>
+          <p:cNvSpPr/>
+          <p:nvPr/>
+        </p:nvSpPr>
+        <p:spPr>
+          <a:xfrm>
+            <a:off x="6217920" y="4206240"/>
+            <a:ext cx="91440" cy="2103120"/>
+          </a:xfrm>
+          <a:prstGeom prst="rect">
+            <a:avLst/>
+          </a:prstGeom>
+          <a:solidFill>
+            <a:srgbClr val="D97706"/>
+          </a:solidFill>
+          <a:ln>
+            <a:noFill/>
+          </a:ln>
+          <a:effectLst/>
+        </p:spPr>
+        <p:style>
+          <a:lnRef idx="1">
+            <a:schemeClr val="accent1"/>
+          </a:lnRef>
+          <a:fillRef idx="3">
+            <a:schemeClr val="accent1"/>
+          </a:fillRef>
+          <a:effectRef idx="2">
+            <a:schemeClr val="accent1"/>
+          </a:effectRef>
+          <a:fontRef idx="minor">
+            <a:schemeClr val="lt1"/>
+          </a:fontRef>
+        </p:style>
+        <p:txBody>
+          <a:bodyPr rtlCol="0" anchor="ctr"/>
+          <a:lstStyle/>
+          <a:p>
+            <a:pPr algn="ctr"/>
+          </a:p>
+        </p:txBody>
+      </p:sp>
+      <p:sp>
+        <p:nvSpPr>
+          <p:cNvPr id="27" name="TextBox 26"/>
+          <p:cNvSpPr txBox="1"/>
+          <p:nvPr/>
+        </p:nvSpPr>
+        <p:spPr>
+          <a:xfrm>
+            <a:off x="6492240" y="4343400"/>
+            <a:ext cx="640080" cy="457200"/>
+          </a:xfrm>
+          <a:prstGeom prst="rect">
+            <a:avLst/>
+          </a:prstGeom>
+          <a:noFill/>
+        </p:spPr>
+        <p:txBody>
+          <a:bodyPr wrap="square" anchor="ctr">
+            <a:spAutoFit/>
+          </a:bodyPr>
+          <a:lstStyle/>
+          <a:p>
+            <a:pPr algn="l"/>
+            <a:r>
+              <a:rPr sz="2800" b="0">
+                <a:rFonts a:eastAsia="Microsoft YaHei" a:ascii="Microsoft YaHei" a:hAnsi="Microsoft YaHei"/>
+                <a:solidFill>
+                  <a:srgbClr val="1C1917"/>
+                </a:solidFill>
+                <a:latin typeface="Microsoft YaHei"/>
+              </a:rPr>
+              <a:t>⚖️</a:t>
+            </a:r>
+          </a:p>
+        </p:txBody>
+      </p:sp>
+      <p:sp>
+        <p:nvSpPr>
+          <p:cNvPr id="28" name="TextBox 27"/>
+          <p:cNvSpPr txBox="1"/>
+          <p:nvPr/>
+        </p:nvSpPr>
+        <p:spPr>
+          <a:xfrm>
+            <a:off x="7132320" y="4343400"/>
+            <a:ext cx="4114800" cy="365760"/>
+          </a:xfrm>
+          <a:prstGeom prst="rect">
+            <a:avLst/>
+          </a:prstGeom>
+          <a:noFill/>
+        </p:spPr>
+        <p:txBody>
+          <a:bodyPr wrap="square" anchor="t">
+            <a:spAutoFit/>
+          </a:bodyPr>
+          <a:lstStyle/>
+          <a:p>
+            <a:pPr algn="l"/>
+            <a:r>
+              <a:rPr sz="1800" b="1">
+                <a:rFonts a:eastAsia="Microsoft YaHei" a:ascii="Microsoft YaHei" a:hAnsi="Microsoft YaHei"/>
+                <a:solidFill>
+                  <a:srgbClr val="1C1917"/>
+                </a:solidFill>
+                <a:latin typeface="Microsoft YaHei"/>
+              </a:rPr>
+              <a:t>责任边界</a:t>
+            </a:r>
+          </a:p>
+        </p:txBody>
+      </p:sp>
+      <p:sp>
+        <p:nvSpPr>
+          <p:cNvPr id="29" name="TextBox 28"/>
+          <p:cNvSpPr txBox="1"/>
+          <p:nvPr/>
+        </p:nvSpPr>
+        <p:spPr>
+          <a:xfrm>
+            <a:off x="7132320" y="4709159"/>
+            <a:ext cx="4114800" cy="274320"/>
+          </a:xfrm>
+          <a:prstGeom prst="rect">
+            <a:avLst/>
+          </a:prstGeom>
+          <a:noFill/>
+        </p:spPr>
+        <p:txBody>
+          <a:bodyPr wrap="square" anchor="t">
+            <a:spAutoFit/>
+          </a:bodyPr>
+          <a:lstStyle/>
+          <a:p>
+            <a:pPr algn="l"/>
+            <a:r>
+              <a:rPr sz="1000" b="0">
+                <a:rFonts a:eastAsia="Calibri" a:ascii="Calibri" a:hAnsi="Calibri"/>
+                <a:solidFill>
+                  <a:srgbClr val="78716C"/>
+                </a:solidFill>
+                <a:latin typeface="Calibri"/>
+              </a:rPr>
+              <a:t>Liability Boundary</a:t>
+            </a:r>
+          </a:p>
+        </p:txBody>
+      </p:sp>
+      <p:sp>
+        <p:nvSpPr>
+          <p:cNvPr id="30" name="TextBox 29"/>
+          <p:cNvSpPr txBox="1"/>
+          <p:nvPr/>
+        </p:nvSpPr>
+        <p:spPr>
+          <a:xfrm>
+            <a:off x="6492240" y="5120640"/>
+            <a:ext cx="4937760" cy="1097280"/>
+          </a:xfrm>
+          <a:prstGeom prst="rect">
+            <a:avLst/>
+          </a:prstGeom>
+          <a:noFill/>
+        </p:spPr>
+        <p:txBody>
+          <a:bodyPr wrap="square" anchor="t">
+            <a:spAutoFit/>
+          </a:bodyPr>
+          <a:lstStyle/>
+          <a:p>
+            <a:pPr algn="l"/>
+            <a:r>
+              <a:rPr sz="1200" b="0">
+                <a:rFonts a:eastAsia="Microsoft YaHei" a:ascii="Microsoft YaHei" a:hAnsi="Microsoft YaHei"/>
+                <a:solidFill>
+                  <a:srgbClr val="44403C"/>
+                </a:solidFill>
+                <a:latin typeface="Microsoft YaHei"/>
+              </a:rPr>
+              <a:t>律瞳为辅助工具，不替代律师专业判断
+所有分析结果仅供参考
+最终决策由持证律师作出</a:t>
+            </a:r>
+          </a:p>
+        </p:txBody>
+      </p:sp>
+      <p:sp>
+        <p:nvSpPr>
+          <p:cNvPr id="31" name="Rectangle 30"/>
+          <p:cNvSpPr/>
+          <p:nvPr/>
+        </p:nvSpPr>
+        <p:spPr>
+          <a:xfrm>
+            <a:off x="457200" y="6035040"/>
+            <a:ext cx="11247120" cy="457200"/>
+          </a:xfrm>
+          <a:prstGeom prst="rect">
+            <a:avLst/>
+          </a:prstGeom>
+          <a:solidFill>
+            <a:srgbClr val="0C4A3E"/>
+          </a:solidFill>
+          <a:ln>
+            <a:noFill/>
+          </a:ln>
+          <a:effectLst/>
+        </p:spPr>
+        <p:style>
+          <a:lnRef idx="1">
+            <a:schemeClr val="accent1"/>
+          </a:lnRef>
+          <a:fillRef idx="3">
+            <a:schemeClr val="accent1"/>
+          </a:fillRef>
+          <a:effectRef idx="2">
+            <a:schemeClr val="accent1"/>
+          </a:effectRef>
+          <a:fontRef idx="minor">
+            <a:schemeClr val="lt1"/>
+          </a:fontRef>
+        </p:style>
+        <p:txBody>
+          <a:bodyPr rtlCol="0" anchor="ctr"/>
+          <a:lstStyle/>
+          <a:p>
+            <a:pPr algn="ctr"/>
+          </a:p>
+        </p:txBody>
+      </p:sp>
+      <p:sp>
+        <p:nvSpPr>
+          <p:cNvPr id="32" name="TextBox 31"/>
+          <p:cNvSpPr txBox="1"/>
+          <p:nvPr/>
+        </p:nvSpPr>
+        <p:spPr>
+          <a:xfrm>
+            <a:off x="457200" y="6035040"/>
+            <a:ext cx="11247120" cy="457200"/>
+          </a:xfrm>
+          <a:prstGeom prst="rect">
+            <a:avLst/>
+          </a:prstGeom>
+          <a:noFill/>
+        </p:spPr>
+        <p:txBody>
+          <a:bodyPr wrap="square" anchor="ctr">
+            <a:spAutoFit/>
+          </a:bodyPr>
+          <a:lstStyle/>
+          <a:p>
+            <a:pPr algn="ctr"/>
+            <a:r>
+              <a:rPr sz="1100" b="0">
+                <a:rFonts a:eastAsia="Microsoft YaHei" a:ascii="Microsoft YaHei" a:hAnsi="Microsoft YaHei"/>
+                <a:solidFill>
+                  <a:srgbClr val="FFFFFF"/>
+                </a:solidFill>
+                <a:latin typeface="Microsoft YaHei"/>
+              </a:rPr>
+              <a:t>📂 完整合规材料 7 份：算法自评估报告 / 安全评估报告 / 用户协议 / 隐私政策 / 免责声明 / 数据来源说明 / README</a:t>
+            </a:r>
+          </a:p>
+        </p:txBody>
+      </p:sp>
+      <p:sp>
+        <p:nvSpPr>
+          <p:cNvPr id="33" name="TextBox 32"/>
+          <p:cNvSpPr txBox="1"/>
+          <p:nvPr/>
+        </p:nvSpPr>
+        <p:spPr>
+          <a:xfrm>
+            <a:off x="457200" y="6492240"/>
+            <a:ext cx="10972800" cy="274320"/>
+          </a:xfrm>
+          <a:prstGeom prst="rect">
+            <a:avLst/>
+          </a:prstGeom>
+          <a:noFill/>
+        </p:spPr>
+        <p:txBody>
+          <a:bodyPr wrap="square" anchor="ctr">
+            <a:spAutoFit/>
+          </a:bodyPr>
+          <a:lstStyle/>
+          <a:p>
+            <a:pPr algn="l"/>
+            <a:r>
+              <a:rPr sz="900" b="0">
+                <a:rFonts a:eastAsia="Microsoft YaHei" a:ascii="Microsoft YaHei" a:hAnsi="Microsoft YaHei"/>
+                <a:solidFill>
+                  <a:srgbClr val="78716C"/>
+                </a:solidFill>
+                <a:latin typeface="Microsoft YaHei"/>
+              </a:rPr>
+              <a:t>律瞳 LegalLens · 律师专属的 AI 案件分析平台</a:t>
+            </a:r>
+          </a:p>
+        </p:txBody>
+      </p:sp>
+    </p:spTree>
+  </p:cSld>
+  <p:clrMapOvr>
+    <a:masterClrMapping/>
+  </p:clrMapOvr>
+</p:sld>
+</file>
+
+<file path=ppt/slides/slide15.xml><?xml version="1.0" encoding="utf-8"?>
+<p:sld xmlns:a="http://schemas.openxmlformats.org/drawingml/2006/main" xmlns:p="http://schemas.openxmlformats.org/presentationml/2006/main" xmlns:r="http://schemas.openxmlformats.org/officeDocument/2006/relationships">
+  <p:cSld>
+    <p:spTree>
+      <p:nvGrpSpPr>
+        <p:cNvPr id="1" name=""/>
+        <p:cNvGrpSpPr/>
+        <p:nvPr/>
+      </p:nvGrpSpPr>
+      <p:grpSpPr/>
+      <p:sp>
+        <p:nvSpPr>
+          <p:cNvPr id="2" name="Rectangle 1"/>
+          <p:cNvSpPr/>
+          <p:nvPr/>
+        </p:nvSpPr>
+        <p:spPr>
+          <a:xfrm>
+            <a:off x="0" y="0"/>
+            <a:ext cx="12188952" cy="411480"/>
+          </a:xfrm>
+          <a:prstGeom prst="rect">
+            <a:avLst/>
+          </a:prstGeom>
+          <a:solidFill>
+            <a:srgbClr val="0C4A3E"/>
+          </a:solidFill>
+          <a:ln>
+            <a:noFill/>
+          </a:ln>
+          <a:effectLst/>
+        </p:spPr>
+        <p:style>
+          <a:lnRef idx="1">
+            <a:schemeClr val="accent1"/>
+          </a:lnRef>
+          <a:fillRef idx="3">
+            <a:schemeClr val="accent1"/>
+          </a:fillRef>
+          <a:effectRef idx="2">
+            <a:schemeClr val="accent1"/>
+          </a:effectRef>
+          <a:fontRef idx="minor">
+            <a:schemeClr val="lt1"/>
+          </a:fontRef>
+        </p:style>
+        <p:txBody>
+          <a:bodyPr rtlCol="0" anchor="ctr"/>
+          <a:lstStyle/>
+          <a:p>
+            <a:pPr algn="ctr"/>
+          </a:p>
+        </p:txBody>
+      </p:sp>
+      <p:sp>
+        <p:nvSpPr>
+          <p:cNvPr id="3" name="TextBox 2"/>
+          <p:cNvSpPr txBox="1"/>
+          <p:nvPr/>
+        </p:nvSpPr>
+        <p:spPr>
+          <a:xfrm>
+            <a:off x="457200" y="45720"/>
+            <a:ext cx="7315200" cy="365760"/>
+          </a:xfrm>
+          <a:prstGeom prst="rect">
+            <a:avLst/>
+          </a:prstGeom>
+          <a:noFill/>
+        </p:spPr>
+        <p:txBody>
+          <a:bodyPr wrap="square" anchor="ctr">
+            <a:spAutoFit/>
+          </a:bodyPr>
+          <a:lstStyle/>
+          <a:p>
+            <a:pPr algn="l"/>
+            <a:r>
+              <a:rPr sz="1100" b="0">
+                <a:rFonts a:eastAsia="Microsoft YaHei" a:ascii="Microsoft YaHei" a:hAnsi="Microsoft YaHei"/>
+                <a:solidFill>
+                  <a:srgbClr val="FFFFFF"/>
+                </a:solidFill>
+                <a:latin typeface="Microsoft YaHei"/>
+              </a:rPr>
+              <a:t>律瞳 LegalLens · 产品介绍</a:t>
+            </a:r>
+          </a:p>
+        </p:txBody>
+      </p:sp>
+      <p:sp>
+        <p:nvSpPr>
+          <p:cNvPr id="4" name="TextBox 3"/>
+          <p:cNvSpPr txBox="1"/>
+          <p:nvPr/>
+        </p:nvSpPr>
+        <p:spPr>
+          <a:xfrm>
+            <a:off x="10058400" y="45720"/>
+            <a:ext cx="1828800" cy="365760"/>
+          </a:xfrm>
+          <a:prstGeom prst="rect">
+            <a:avLst/>
+          </a:prstGeom>
+          <a:noFill/>
+        </p:spPr>
+        <p:txBody>
+          <a:bodyPr wrap="square" anchor="ctr">
+            <a:spAutoFit/>
+          </a:bodyPr>
+          <a:lstStyle/>
+          <a:p>
+            <a:pPr algn="r"/>
+            <a:r>
+              <a:rPr sz="1000" b="0">
+                <a:rFonts a:eastAsia="Calibri" a:ascii="Calibri" a:hAnsi="Calibri"/>
+                <a:solidFill>
+                  <a:srgbClr val="FFFFFF"/>
+                </a:solidFill>
+                <a:latin typeface="Calibri"/>
+              </a:rPr>
+              <a:t>15 / 16</a:t>
+            </a:r>
+          </a:p>
+        </p:txBody>
+      </p:sp>
+      <p:sp>
+        <p:nvSpPr>
+          <p:cNvPr id="5" name="TextBox 4"/>
+          <p:cNvSpPr txBox="1"/>
+          <p:nvPr/>
+        </p:nvSpPr>
+        <p:spPr>
+          <a:xfrm>
+            <a:off x="457200" y="640080"/>
+            <a:ext cx="10972800" cy="548640"/>
+          </a:xfrm>
+          <a:prstGeom prst="rect">
+            <a:avLst/>
+          </a:prstGeom>
+          <a:noFill/>
+        </p:spPr>
+        <p:txBody>
+          <a:bodyPr wrap="square" anchor="t">
+            <a:spAutoFit/>
+          </a:bodyPr>
+          <a:lstStyle/>
+          <a:p>
+            <a:pPr algn="l"/>
+            <a:r>
+              <a:rPr sz="2800" b="1">
+                <a:rFonts a:eastAsia="Microsoft YaHei" a:ascii="Microsoft YaHei" a:hAnsi="Microsoft YaHei"/>
+                <a:solidFill>
+                  <a:srgbClr val="0C4A3E"/>
+                </a:solidFill>
+                <a:latin typeface="Microsoft YaHei"/>
+              </a:rPr>
+              <a:t>07 后续落地计划 / Roadmap</a:t>
+            </a:r>
+          </a:p>
+        </p:txBody>
+      </p:sp>
+      <p:sp>
+        <p:nvSpPr>
+          <p:cNvPr id="6" name="TextBox 5"/>
+          <p:cNvSpPr txBox="1"/>
+          <p:nvPr/>
+        </p:nvSpPr>
+        <p:spPr>
+          <a:xfrm>
+            <a:off x="457200" y="1280160"/>
+            <a:ext cx="10972800" cy="365760"/>
+          </a:xfrm>
+          <a:prstGeom prst="rect">
+            <a:avLst/>
+          </a:prstGeom>
+          <a:noFill/>
+        </p:spPr>
+        <p:txBody>
+          <a:bodyPr wrap="square" anchor="t">
+            <a:spAutoFit/>
+          </a:bodyPr>
+          <a:lstStyle/>
+          <a:p>
+            <a:pPr algn="l"/>
+            <a:r>
+              <a:rPr sz="1200" b="0">
+                <a:rFonts a:eastAsia="Calibri" a:ascii="Calibri" a:hAnsi="Calibri"/>
+                <a:solidFill>
+                  <a:srgbClr val="78716C"/>
+                </a:solidFill>
+                <a:latin typeface="Calibri"/>
+              </a:rPr>
+              <a:t>从 MVP 到规模化的清晰路径 / Clear Path from MVP to Scale</a:t>
+            </a:r>
+          </a:p>
+        </p:txBody>
+      </p:sp>
+      <p:sp>
+        <p:nvSpPr>
+          <p:cNvPr id="7" name="Rectangle 6"/>
+          <p:cNvSpPr/>
+          <p:nvPr/>
+        </p:nvSpPr>
+        <p:spPr>
+          <a:xfrm>
+            <a:off x="457200" y="1828800"/>
+            <a:ext cx="3657600" cy="548640"/>
+          </a:xfrm>
+          <a:prstGeom prst="rect">
+            <a:avLst/>
+          </a:prstGeom>
+          <a:solidFill>
+            <a:srgbClr val="0C4A3E"/>
+          </a:solidFill>
+          <a:ln>
+            <a:noFill/>
+          </a:ln>
+          <a:effectLst/>
+        </p:spPr>
+        <p:style>
+          <a:lnRef idx="1">
+            <a:schemeClr val="accent1"/>
+          </a:lnRef>
+          <a:fillRef idx="3">
+            <a:schemeClr val="accent1"/>
+          </a:fillRef>
+          <a:effectRef idx="2">
+            <a:schemeClr val="accent1"/>
+          </a:effectRef>
+          <a:fontRef idx="minor">
+            <a:schemeClr val="lt1"/>
+          </a:fontRef>
+        </p:style>
+        <p:txBody>
+          <a:bodyPr rtlCol="0" anchor="ctr"/>
+          <a:lstStyle/>
+          <a:p>
+            <a:pPr algn="ctr"/>
+          </a:p>
+        </p:txBody>
+      </p:sp>
+      <p:sp>
+        <p:nvSpPr>
+          <p:cNvPr id="8" name="TextBox 7"/>
+          <p:cNvSpPr txBox="1"/>
+          <p:nvPr/>
+        </p:nvSpPr>
+        <p:spPr>
+          <a:xfrm>
+            <a:off x="640080" y="1828800"/>
+            <a:ext cx="3291840" cy="548640"/>
+          </a:xfrm>
+          <a:prstGeom prst="rect">
+            <a:avLst/>
+          </a:prstGeom>
+          <a:noFill/>
+        </p:spPr>
+        <p:txBody>
+          <a:bodyPr wrap="square" anchor="ctr">
+            <a:spAutoFit/>
+          </a:bodyPr>
+          <a:lstStyle/>
+          <a:p>
+            <a:pPr algn="l"/>
+            <a:r>
+              <a:rPr sz="1300" b="1">
+                <a:rFonts a:eastAsia="Microsoft YaHei" a:ascii="Microsoft YaHei" a:hAnsi="Microsoft YaHei"/>
+                <a:solidFill>
+                  <a:srgbClr val="FFFFFF"/>
+                </a:solidFill>
+                <a:latin typeface="Microsoft YaHei"/>
+              </a:rPr>
+              <a:t>Phase 1 · 已完成 ✅</a:t>
+            </a:r>
+          </a:p>
+        </p:txBody>
+      </p:sp>
+      <p:sp>
+        <p:nvSpPr>
+          <p:cNvPr id="9" name="Rectangle 8"/>
+          <p:cNvSpPr/>
+          <p:nvPr/>
+        </p:nvSpPr>
+        <p:spPr>
+          <a:xfrm>
+            <a:off x="457200" y="2377440"/>
+            <a:ext cx="3657600" cy="640080"/>
+          </a:xfrm>
+          <a:prstGeom prst="rect">
+            <a:avLst/>
+          </a:prstGeom>
+          <a:solidFill>
+            <a:srgbClr val="F5F5F4"/>
+          </a:solidFill>
+          <a:ln>
+            <a:noFill/>
+          </a:ln>
+          <a:effectLst/>
+        </p:spPr>
+        <p:style>
+          <a:lnRef idx="1">
+            <a:schemeClr val="accent1"/>
+          </a:lnRef>
+          <a:fillRef idx="3">
+            <a:schemeClr val="accent1"/>
+          </a:fillRef>
+          <a:effectRef idx="2">
+            <a:schemeClr val="accent1"/>
+          </a:effectRef>
+          <a:fontRef idx="minor">
+            <a:schemeClr val="lt1"/>
+          </a:fontRef>
+        </p:style>
+        <p:txBody>
+          <a:bodyPr rtlCol="0" anchor="ctr"/>
+          <a:lstStyle/>
+          <a:p>
+            <a:pPr algn="ctr"/>
+          </a:p>
+        </p:txBody>
+      </p:sp>
+      <p:sp>
+        <p:nvSpPr>
+          <p:cNvPr id="10" name="TextBox 9"/>
+          <p:cNvSpPr txBox="1"/>
+          <p:nvPr/>
+        </p:nvSpPr>
+        <p:spPr>
+          <a:xfrm>
+            <a:off x="640080" y="2377440"/>
+            <a:ext cx="3291840" cy="640080"/>
+          </a:xfrm>
+          <a:prstGeom prst="rect">
+            <a:avLst/>
+          </a:prstGeom>
+          <a:noFill/>
+        </p:spPr>
+        <p:txBody>
+          <a:bodyPr wrap="square" anchor="ctr">
+            <a:spAutoFit/>
+          </a:bodyPr>
+          <a:lstStyle/>
+          <a:p>
+            <a:pPr algn="l"/>
+            <a:r>
+              <a:rPr sz="1800" b="1">
+                <a:rFonts a:eastAsia="Microsoft YaHei" a:ascii="Microsoft YaHei" a:hAnsi="Microsoft YaHei"/>
+                <a:solidFill>
+                  <a:srgbClr val="0C4A3E"/>
+                </a:solidFill>
+                <a:latin typeface="Microsoft YaHei"/>
+              </a:rPr>
+              <a:t>MVP 验证</a:t>
+            </a:r>
+          </a:p>
+        </p:txBody>
+      </p:sp>
+      <p:sp>
+        <p:nvSpPr>
+          <p:cNvPr id="11" name="TextBox 10"/>
+          <p:cNvSpPr txBox="1"/>
+          <p:nvPr/>
+        </p:nvSpPr>
+        <p:spPr>
+          <a:xfrm>
+            <a:off x="640080" y="3017520"/>
+            <a:ext cx="3291840" cy="274320"/>
+          </a:xfrm>
+          <a:prstGeom prst="rect">
+            <a:avLst/>
+          </a:prstGeom>
+          <a:noFill/>
+        </p:spPr>
+        <p:txBody>
+          <a:bodyPr wrap="square" anchor="t">
+            <a:spAutoFit/>
+          </a:bodyPr>
+          <a:lstStyle/>
+          <a:p>
+            <a:pPr algn="l"/>
+            <a:r>
+              <a:rPr sz="1000" b="0">
+                <a:rFonts a:eastAsia="Calibri" a:ascii="Calibri" a:hAnsi="Calibri"/>
+                <a:solidFill>
+                  <a:srgbClr val="78716C"/>
+                </a:solidFill>
+                <a:latin typeface="Calibri"/>
+              </a:rPr>
+              <a:t>MVP Validated</a:t>
+            </a:r>
+          </a:p>
+        </p:txBody>
+      </p:sp>
+      <p:sp>
+        <p:nvSpPr>
+          <p:cNvPr id="12" name="TextBox 11"/>
+          <p:cNvSpPr txBox="1"/>
+          <p:nvPr/>
+        </p:nvSpPr>
+        <p:spPr>
+          <a:xfrm>
+            <a:off x="640080" y="3383280"/>
+            <a:ext cx="3291840" cy="2560320"/>
+          </a:xfrm>
+          <a:prstGeom prst="rect">
+            <a:avLst/>
+          </a:prstGeom>
+          <a:noFill/>
+        </p:spPr>
+        <p:txBody>
+          <a:bodyPr wrap="square">
+            <a:spAutoFit/>
+          </a:bodyPr>
+          <a:lstStyle/>
+          <a:p>
+            <a:pPr algn="l">
+              <a:spcAft>
+                <a:spcPts val="800"/>
+              </a:spcAft>
+            </a:pPr>
+            <a:r>
+              <a:rPr sz="1100">
+                <a:rFonts a:eastAsia="Microsoft YaHei"/>
+                <a:solidFill>
+                  <a:srgbClr val="0C4A3E"/>
+                </a:solidFill>
+                <a:latin typeface="Calibri"/>
+              </a:rPr>
+              <a:t>●  </a:t>
+            </a:r>
+            <a:r>
+              <a:rPr sz="1100">
+                <a:rFonts a:eastAsia="Microsoft YaHei"/>
+                <a:solidFill>
+                  <a:srgbClr val="44403C"/>
+                </a:solidFill>
+                <a:latin typeface="Microsoft YaHei"/>
+              </a:rPr>
+              <a:t>全栈开发完成并上线公网访问</a:t>
+            </a:r>
+          </a:p>
+          <a:p>
+            <a:pPr algn="l">
+              <a:spcAft>
+                <a:spcPts val="800"/>
+              </a:spcAft>
+            </a:pPr>
+            <a:r>
+              <a:rPr sz="1100">
+                <a:rFonts a:eastAsia="Microsoft YaHei"/>
+                <a:solidFill>
+                  <a:srgbClr val="0C4A3E"/>
+                </a:solidFill>
+                <a:latin typeface="Calibri"/>
+              </a:rPr>
+              <a:t>●  </a:t>
+            </a:r>
+            <a:r>
+              <a:rPr sz="1100">
+                <a:rFonts a:eastAsia="Microsoft YaHei"/>
+                <a:solidFill>
+                  <a:srgbClr val="44403C"/>
+                </a:solidFill>
+                <a:latin typeface="Microsoft YaHei"/>
+              </a:rPr>
+              <a:t>26 部法律 + 30 真实判例知识库</a:t>
+            </a:r>
+          </a:p>
+          <a:p>
+            <a:pPr algn="l">
+              <a:spcAft>
+                <a:spcPts val="800"/>
+              </a:spcAft>
+            </a:pPr>
+            <a:r>
+              <a:rPr sz="1100">
+                <a:rFonts a:eastAsia="Microsoft YaHei"/>
+                <a:solidFill>
+                  <a:srgbClr val="0C4A3E"/>
+                </a:solidFill>
+                <a:latin typeface="Calibri"/>
+              </a:rPr>
+              <a:t>●  </a:t>
+            </a:r>
+            <a:r>
+              <a:rPr sz="1100">
+                <a:rFonts a:eastAsia="Microsoft YaHei"/>
+                <a:solidFill>
+                  <a:srgbClr val="44403C"/>
+                </a:solidFill>
+                <a:latin typeface="Microsoft YaHei"/>
+              </a:rPr>
+              <a:t>4 Agent 协同案情分析、类案检索、合同审查</a:t>
+            </a:r>
+          </a:p>
+          <a:p>
+            <a:pPr algn="l">
+              <a:spcAft>
+                <a:spcPts val="800"/>
+              </a:spcAft>
+            </a:pPr>
+            <a:r>
+              <a:rPr sz="1100">
+                <a:rFonts a:eastAsia="Microsoft YaHei"/>
+                <a:solidFill>
+                  <a:srgbClr val="0C4A3E"/>
+                </a:solidFill>
+                <a:latin typeface="Calibri"/>
+              </a:rPr>
+              <a:t>●  </a:t>
+            </a:r>
+            <a:r>
+              <a:rPr sz="1100">
+                <a:rFonts a:eastAsia="Microsoft YaHei"/>
+                <a:solidFill>
+                  <a:srgbClr val="44403C"/>
+                </a:solidFill>
+                <a:latin typeface="Microsoft YaHei"/>
+              </a:rPr>
+              <a:t>用户注册登录系统（与现有产品账号互通）</a:t>
+            </a:r>
+          </a:p>
+          <a:p>
+            <a:pPr algn="l">
+              <a:spcAft>
+                <a:spcPts val="800"/>
+              </a:spcAft>
+            </a:pPr>
+            <a:r>
+              <a:rPr sz="1100">
+                <a:rFonts a:eastAsia="Microsoft YaHei"/>
+                <a:solidFill>
+                  <a:srgbClr val="0C4A3E"/>
+                </a:solidFill>
+                <a:latin typeface="Calibri"/>
+              </a:rPr>
+              <a:t>●  </a:t>
+            </a:r>
+            <a:r>
+              <a:rPr sz="1100">
+                <a:rFonts a:eastAsia="Microsoft YaHei"/>
+                <a:solidFill>
+                  <a:srgbClr val="44403C"/>
+                </a:solidFill>
+                <a:latin typeface="Microsoft YaHei"/>
+              </a:rPr>
+              <a:t>生成式 AI 备案合规材料就位（7 份文档）</a:t>
+            </a:r>
+          </a:p>
+        </p:txBody>
+      </p:sp>
+      <p:sp>
+        <p:nvSpPr>
+          <p:cNvPr id="13" name="Rectangle 12"/>
+          <p:cNvSpPr/>
+          <p:nvPr/>
+        </p:nvSpPr>
+        <p:spPr>
+          <a:xfrm>
+            <a:off x="4251960" y="1828800"/>
+            <a:ext cx="3657600" cy="548640"/>
+          </a:xfrm>
+          <a:prstGeom prst="rect">
+            <a:avLst/>
+          </a:prstGeom>
+          <a:solidFill>
+            <a:srgbClr val="D97706"/>
+          </a:solidFill>
+          <a:ln>
+            <a:noFill/>
+          </a:ln>
+          <a:effectLst/>
+        </p:spPr>
+        <p:style>
+          <a:lnRef idx="1">
+            <a:schemeClr val="accent1"/>
+          </a:lnRef>
+          <a:fillRef idx="3">
+            <a:schemeClr val="accent1"/>
+          </a:fillRef>
+          <a:effectRef idx="2">
+            <a:schemeClr val="accent1"/>
+          </a:effectRef>
+          <a:fontRef idx="minor">
+            <a:schemeClr val="lt1"/>
+          </a:fontRef>
+        </p:style>
+        <p:txBody>
+          <a:bodyPr rtlCol="0" anchor="ctr"/>
+          <a:lstStyle/>
+          <a:p>
+            <a:pPr algn="ctr"/>
+          </a:p>
+        </p:txBody>
+      </p:sp>
+      <p:sp>
+        <p:nvSpPr>
+          <p:cNvPr id="14" name="TextBox 13"/>
+          <p:cNvSpPr txBox="1"/>
+          <p:nvPr/>
+        </p:nvSpPr>
+        <p:spPr>
+          <a:xfrm>
+            <a:off x="4434840" y="1828800"/>
+            <a:ext cx="3291840" cy="548640"/>
+          </a:xfrm>
+          <a:prstGeom prst="rect">
+            <a:avLst/>
+          </a:prstGeom>
+          <a:noFill/>
+        </p:spPr>
+        <p:txBody>
+          <a:bodyPr wrap="square" anchor="ctr">
+            <a:spAutoFit/>
+          </a:bodyPr>
+          <a:lstStyle/>
+          <a:p>
+            <a:pPr algn="l"/>
+            <a:r>
+              <a:rPr sz="1300" b="1">
+                <a:rFonts a:eastAsia="Microsoft YaHei" a:ascii="Microsoft YaHei" a:hAnsi="Microsoft YaHei"/>
+                <a:solidFill>
+                  <a:srgbClr val="FFFFFF"/>
+                </a:solidFill>
+                <a:latin typeface="Microsoft YaHei"/>
+              </a:rPr>
+              <a:t>Phase 2 · 3 个月内 ⏳</a:t>
+            </a:r>
+          </a:p>
+        </p:txBody>
+      </p:sp>
+      <p:sp>
+        <p:nvSpPr>
+          <p:cNvPr id="15" name="Rectangle 14"/>
+          <p:cNvSpPr/>
+          <p:nvPr/>
+        </p:nvSpPr>
+        <p:spPr>
+          <a:xfrm>
+            <a:off x="4251960" y="2377440"/>
+            <a:ext cx="3657600" cy="640080"/>
+          </a:xfrm>
+          <a:prstGeom prst="rect">
+            <a:avLst/>
+          </a:prstGeom>
+          <a:solidFill>
+            <a:srgbClr val="F5F5F4"/>
+          </a:solidFill>
+          <a:ln>
+            <a:noFill/>
+          </a:ln>
+          <a:effectLst/>
+        </p:spPr>
+        <p:style>
+          <a:lnRef idx="1">
+            <a:schemeClr val="accent1"/>
+          </a:lnRef>
+          <a:fillRef idx="3">
+            <a:schemeClr val="accent1"/>
+          </a:fillRef>
+          <a:effectRef idx="2">
+            <a:schemeClr val="accent1"/>
+          </a:effectRef>
+          <a:fontRef idx="minor">
+            <a:schemeClr val="lt1"/>
+          </a:fontRef>
+        </p:style>
+        <p:txBody>
+          <a:bodyPr rtlCol="0" anchor="ctr"/>
+          <a:lstStyle/>
+          <a:p>
+            <a:pPr algn="ctr"/>
+          </a:p>
+        </p:txBody>
+      </p:sp>
+      <p:sp>
+        <p:nvSpPr>
+          <p:cNvPr id="16" name="TextBox 15"/>
+          <p:cNvSpPr txBox="1"/>
+          <p:nvPr/>
+        </p:nvSpPr>
+        <p:spPr>
+          <a:xfrm>
+            <a:off x="4434840" y="2377440"/>
+            <a:ext cx="3291840" cy="640080"/>
+          </a:xfrm>
+          <a:prstGeom prst="rect">
+            <a:avLst/>
+          </a:prstGeom>
+          <a:noFill/>
+        </p:spPr>
+        <p:txBody>
+          <a:bodyPr wrap="square" anchor="ctr">
+            <a:spAutoFit/>
+          </a:bodyPr>
+          <a:lstStyle/>
+          <a:p>
+            <a:pPr algn="l"/>
+            <a:r>
+              <a:rPr sz="1800" b="1">
+                <a:rFonts a:eastAsia="Microsoft YaHei" a:ascii="Microsoft YaHei" a:hAnsi="Microsoft YaHei"/>
+                <a:solidFill>
+                  <a:srgbClr val="D97706"/>
+                </a:solidFill>
+                <a:latin typeface="Microsoft YaHei"/>
+              </a:rPr>
+              <a:t>功能深化</a:t>
+            </a:r>
+          </a:p>
+        </p:txBody>
+      </p:sp>
+      <p:sp>
+        <p:nvSpPr>
+          <p:cNvPr id="17" name="TextBox 16"/>
+          <p:cNvSpPr txBox="1"/>
+          <p:nvPr/>
+        </p:nvSpPr>
+        <p:spPr>
+          <a:xfrm>
+            <a:off x="4434840" y="3017520"/>
+            <a:ext cx="3291840" cy="274320"/>
+          </a:xfrm>
+          <a:prstGeom prst="rect">
+            <a:avLst/>
+          </a:prstGeom>
+          <a:noFill/>
+        </p:spPr>
+        <p:txBody>
+          <a:bodyPr wrap="square" anchor="t">
+            <a:spAutoFit/>
+          </a:bodyPr>
+          <a:lstStyle/>
+          <a:p>
+            <a:pPr algn="l"/>
+            <a:r>
+              <a:rPr sz="1000" b="0">
+                <a:rFonts a:eastAsia="Calibri" a:ascii="Calibri" a:hAnsi="Calibri"/>
+                <a:solidFill>
+                  <a:srgbClr val="78716C"/>
+                </a:solidFill>
+                <a:latin typeface="Calibri"/>
+              </a:rPr>
+              <a:t>Feature Enhancement</a:t>
+            </a:r>
+          </a:p>
+        </p:txBody>
+      </p:sp>
+      <p:sp>
+        <p:nvSpPr>
+          <p:cNvPr id="18" name="TextBox 17"/>
+          <p:cNvSpPr txBox="1"/>
+          <p:nvPr/>
+        </p:nvSpPr>
+        <p:spPr>
+          <a:xfrm>
+            <a:off x="4434840" y="3383280"/>
+            <a:ext cx="3291840" cy="2560320"/>
+          </a:xfrm>
+          <a:prstGeom prst="rect">
+            <a:avLst/>
+          </a:prstGeom>
+          <a:noFill/>
+        </p:spPr>
+        <p:txBody>
+          <a:bodyPr wrap="square">
+            <a:spAutoFit/>
+          </a:bodyPr>
+          <a:lstStyle/>
+          <a:p>
+            <a:pPr algn="l">
+              <a:spcAft>
+                <a:spcPts val="800"/>
+              </a:spcAft>
+            </a:pPr>
+            <a:r>
+              <a:rPr sz="1100">
+                <a:rFonts a:eastAsia="Microsoft YaHei"/>
+                <a:solidFill>
+                  <a:srgbClr val="D97706"/>
+                </a:solidFill>
+                <a:latin typeface="Calibri"/>
+              </a:rPr>
+              <a:t>●  </a:t>
+            </a:r>
+            <a:r>
+              <a:rPr sz="1100">
+                <a:rFonts a:eastAsia="Microsoft YaHei"/>
+                <a:solidFill>
+                  <a:srgbClr val="44403C"/>
+                </a:solidFill>
+                <a:latin typeface="Microsoft YaHei"/>
+              </a:rPr>
+              <a:t>Obsidian 双向同步：本地笔记 ↔ 律瞳案件</a:t>
+            </a:r>
+          </a:p>
+          <a:p>
+            <a:pPr algn="l">
+              <a:spcAft>
+                <a:spcPts val="800"/>
+              </a:spcAft>
+            </a:pPr>
+            <a:r>
+              <a:rPr sz="1100">
+                <a:rFonts a:eastAsia="Microsoft YaHei"/>
+                <a:solidFill>
+                  <a:srgbClr val="D97706"/>
+                </a:solidFill>
+                <a:latin typeface="Calibri"/>
+              </a:rPr>
+              <a:t>●  </a:t>
+            </a:r>
+            <a:r>
+              <a:rPr sz="1100">
+                <a:rFonts a:eastAsia="Microsoft YaHei"/>
+                <a:solidFill>
+                  <a:srgbClr val="44403C"/>
+                </a:solidFill>
+                <a:latin typeface="Microsoft YaHei"/>
+              </a:rPr>
+              <a:t>扩展裁判文书至 100+（覆盖更多法院级别）</a:t>
+            </a:r>
+          </a:p>
+          <a:p>
+            <a:pPr algn="l">
+              <a:spcAft>
+                <a:spcPts val="800"/>
+              </a:spcAft>
+            </a:pPr>
+            <a:r>
+              <a:rPr sz="1100">
+                <a:rFonts a:eastAsia="Microsoft YaHei"/>
+                <a:solidFill>
+                  <a:srgbClr val="D97706"/>
+                </a:solidFill>
+                <a:latin typeface="Calibri"/>
+              </a:rPr>
+              <a:t>●  </a:t>
+            </a:r>
+            <a:r>
+              <a:rPr sz="1100">
+                <a:rFonts a:eastAsia="Microsoft YaHei"/>
+                <a:solidFill>
+                  <a:srgbClr val="44403C"/>
+                </a:solidFill>
+                <a:latin typeface="Microsoft YaHei"/>
+              </a:rPr>
+              <a:t>多语种支持：英文 / 繁中裁判文书</a:t>
+            </a:r>
+          </a:p>
+          <a:p>
+            <a:pPr algn="l">
+              <a:spcAft>
+                <a:spcPts val="800"/>
+              </a:spcAft>
+            </a:pPr>
+            <a:r>
+              <a:rPr sz="1100">
+                <a:rFonts a:eastAsia="Microsoft YaHei"/>
+                <a:solidFill>
+                  <a:srgbClr val="D97706"/>
+                </a:solidFill>
+                <a:latin typeface="Calibri"/>
+              </a:rPr>
+              <a:t>●  </a:t>
+            </a:r>
+            <a:r>
+              <a:rPr sz="1100">
+                <a:rFonts a:eastAsia="Microsoft YaHei"/>
+                <a:solidFill>
+                  <a:srgbClr val="44403C"/>
+                </a:solidFill>
+                <a:latin typeface="Microsoft YaHei"/>
+              </a:rPr>
+              <a:t>律所团队协作：案件多人协同、批注、版本管理</a:t>
+            </a:r>
+          </a:p>
+        </p:txBody>
+      </p:sp>
+      <p:sp>
+        <p:nvSpPr>
+          <p:cNvPr id="19" name="Rectangle 18"/>
+          <p:cNvSpPr/>
+          <p:nvPr/>
+        </p:nvSpPr>
+        <p:spPr>
+          <a:xfrm>
+            <a:off x="8046720" y="1828800"/>
+            <a:ext cx="3657600" cy="548640"/>
+          </a:xfrm>
+          <a:prstGeom prst="rect">
+            <a:avLst/>
+          </a:prstGeom>
+          <a:solidFill>
+            <a:srgbClr val="0C4A3E"/>
+          </a:solidFill>
+          <a:ln>
+            <a:noFill/>
+          </a:ln>
+          <a:effectLst/>
+        </p:spPr>
+        <p:style>
+          <a:lnRef idx="1">
+            <a:schemeClr val="accent1"/>
+          </a:lnRef>
+          <a:fillRef idx="3">
+            <a:schemeClr val="accent1"/>
+          </a:fillRef>
+          <a:effectRef idx="2">
+            <a:schemeClr val="accent1"/>
+          </a:effectRef>
+          <a:fontRef idx="minor">
+            <a:schemeClr val="lt1"/>
+          </a:fontRef>
+        </p:style>
+        <p:txBody>
+          <a:bodyPr rtlCol="0" anchor="ctr"/>
+          <a:lstStyle/>
+          <a:p>
+            <a:pPr algn="ctr"/>
+          </a:p>
+        </p:txBody>
+      </p:sp>
+      <p:sp>
+        <p:nvSpPr>
+          <p:cNvPr id="20" name="TextBox 19"/>
+          <p:cNvSpPr txBox="1"/>
+          <p:nvPr/>
+        </p:nvSpPr>
+        <p:spPr>
+          <a:xfrm>
+            <a:off x="8229600" y="1828800"/>
+            <a:ext cx="3291840" cy="548640"/>
+          </a:xfrm>
+          <a:prstGeom prst="rect">
+            <a:avLst/>
+          </a:prstGeom>
+          <a:noFill/>
+        </p:spPr>
+        <p:txBody>
+          <a:bodyPr wrap="square" anchor="ctr">
+            <a:spAutoFit/>
+          </a:bodyPr>
+          <a:lstStyle/>
+          <a:p>
+            <a:pPr algn="l"/>
+            <a:r>
+              <a:rPr sz="1300" b="1">
+                <a:rFonts a:eastAsia="Microsoft YaHei" a:ascii="Microsoft YaHei" a:hAnsi="Microsoft YaHei"/>
+                <a:solidFill>
+                  <a:srgbClr val="FFFFFF"/>
+                </a:solidFill>
+                <a:latin typeface="Microsoft YaHei"/>
+              </a:rPr>
+              <a:t>Phase 3 · 6-12 个月 🚀</a:t>
+            </a:r>
+          </a:p>
+        </p:txBody>
+      </p:sp>
+      <p:sp>
+        <p:nvSpPr>
+          <p:cNvPr id="21" name="Rectangle 20"/>
+          <p:cNvSpPr/>
+          <p:nvPr/>
+        </p:nvSpPr>
+        <p:spPr>
+          <a:xfrm>
+            <a:off x="8046720" y="2377440"/>
+            <a:ext cx="3657600" cy="640080"/>
+          </a:xfrm>
+          <a:prstGeom prst="rect">
+            <a:avLst/>
+          </a:prstGeom>
+          <a:solidFill>
+            <a:srgbClr val="F5F5F4"/>
+          </a:solidFill>
+          <a:ln>
+            <a:noFill/>
+          </a:ln>
+          <a:effectLst/>
+        </p:spPr>
+        <p:style>
+          <a:lnRef idx="1">
+            <a:schemeClr val="accent1"/>
+          </a:lnRef>
+          <a:fillRef idx="3">
+            <a:schemeClr val="accent1"/>
+          </a:fillRef>
+          <a:effectRef idx="2">
+            <a:schemeClr val="accent1"/>
+          </a:effectRef>
+          <a:fontRef idx="minor">
+            <a:schemeClr val="lt1"/>
+          </a:fontRef>
+        </p:style>
+        <p:txBody>
+          <a:bodyPr rtlCol="0" anchor="ctr"/>
+          <a:lstStyle/>
+          <a:p>
+            <a:pPr algn="ctr"/>
+          </a:p>
+        </p:txBody>
+      </p:sp>
+      <p:sp>
+        <p:nvSpPr>
+          <p:cNvPr id="22" name="TextBox 21"/>
+          <p:cNvSpPr txBox="1"/>
+          <p:nvPr/>
+        </p:nvSpPr>
+        <p:spPr>
+          <a:xfrm>
+            <a:off x="8229600" y="2377440"/>
+            <a:ext cx="3291840" cy="640080"/>
+          </a:xfrm>
+          <a:prstGeom prst="rect">
+            <a:avLst/>
+          </a:prstGeom>
+          <a:noFill/>
+        </p:spPr>
+        <p:txBody>
+          <a:bodyPr wrap="square" anchor="ctr">
+            <a:spAutoFit/>
+          </a:bodyPr>
+          <a:lstStyle/>
+          <a:p>
+            <a:pPr algn="l"/>
+            <a:r>
+              <a:rPr sz="1800" b="1">
+                <a:rFonts a:eastAsia="Microsoft YaHei" a:ascii="Microsoft YaHei" a:hAnsi="Microsoft YaHei"/>
+                <a:solidFill>
+                  <a:srgbClr val="0C4A3E"/>
+                </a:solidFill>
+                <a:latin typeface="Microsoft YaHei"/>
+              </a:rPr>
+              <a:t>规模落地</a:t>
+            </a:r>
+          </a:p>
+        </p:txBody>
+      </p:sp>
+      <p:sp>
+        <p:nvSpPr>
+          <p:cNvPr id="23" name="TextBox 22"/>
+          <p:cNvSpPr txBox="1"/>
+          <p:nvPr/>
+        </p:nvSpPr>
+        <p:spPr>
+          <a:xfrm>
+            <a:off x="8229600" y="3017520"/>
+            <a:ext cx="3291840" cy="274320"/>
+          </a:xfrm>
+          <a:prstGeom prst="rect">
+            <a:avLst/>
+          </a:prstGeom>
+          <a:noFill/>
+        </p:spPr>
+        <p:txBody>
+          <a:bodyPr wrap="square" anchor="t">
+            <a:spAutoFit/>
+          </a:bodyPr>
+          <a:lstStyle/>
+          <a:p>
+            <a:pPr algn="l"/>
+            <a:r>
+              <a:rPr sz="1000" b="0">
+                <a:rFonts a:eastAsia="Calibri" a:ascii="Calibri" a:hAnsi="Calibri"/>
+                <a:solidFill>
+                  <a:srgbClr val="78716C"/>
+                </a:solidFill>
+                <a:latin typeface="Calibri"/>
+              </a:rPr>
+              <a:t>Scale &amp; Ecosystem</a:t>
+            </a:r>
+          </a:p>
+        </p:txBody>
+      </p:sp>
+      <p:sp>
+        <p:nvSpPr>
+          <p:cNvPr id="24" name="TextBox 23"/>
+          <p:cNvSpPr txBox="1"/>
+          <p:nvPr/>
+        </p:nvSpPr>
+        <p:spPr>
+          <a:xfrm>
+            <a:off x="8229600" y="3383280"/>
+            <a:ext cx="3291840" cy="2560320"/>
+          </a:xfrm>
+          <a:prstGeom prst="rect">
+            <a:avLst/>
+          </a:prstGeom>
+          <a:noFill/>
+        </p:spPr>
+        <p:txBody>
+          <a:bodyPr wrap="square">
+            <a:spAutoFit/>
+          </a:bodyPr>
+          <a:lstStyle/>
+          <a:p>
+            <a:pPr algn="l">
+              <a:spcAft>
+                <a:spcPts val="800"/>
+              </a:spcAft>
+            </a:pPr>
+            <a:r>
+              <a:rPr sz="1100">
+                <a:rFonts a:eastAsia="Microsoft YaHei"/>
+                <a:solidFill>
+                  <a:srgbClr val="0C4A3E"/>
+                </a:solidFill>
+                <a:latin typeface="Calibri"/>
+              </a:rPr>
+              <a:t>●  </a:t>
+            </a:r>
+            <a:r>
+              <a:rPr sz="1100">
+                <a:rFonts a:eastAsia="Microsoft YaHei"/>
+                <a:solidFill>
+                  <a:srgbClr val="44403C"/>
+                </a:solidFill>
+                <a:latin typeface="Microsoft YaHei"/>
+              </a:rPr>
+              <a:t>开放 API：与律所 OA / 电子签章 / 案源系统对接</a:t>
+            </a:r>
+          </a:p>
+          <a:p>
+            <a:pPr algn="l">
+              <a:spcAft>
+                <a:spcPts val="800"/>
+              </a:spcAft>
+            </a:pPr>
+            <a:r>
+              <a:rPr sz="1100">
+                <a:rFonts a:eastAsia="Microsoft YaHei"/>
+                <a:solidFill>
+                  <a:srgbClr val="0C4A3E"/>
+                </a:solidFill>
+                <a:latin typeface="Calibri"/>
+              </a:rPr>
+              <a:t>●  </a:t>
+            </a:r>
+            <a:r>
+              <a:rPr sz="1100">
+                <a:rFonts a:eastAsia="Microsoft YaHei"/>
+                <a:solidFill>
+                  <a:srgbClr val="44403C"/>
+                </a:solidFill>
+                <a:latin typeface="Microsoft YaHei"/>
+              </a:rPr>
+              <a:t>SaaS 商业化：律师版 / 律所版 / 企业法务版分级订阅</a:t>
+            </a:r>
+          </a:p>
+          <a:p>
+            <a:pPr algn="l">
+              <a:spcAft>
+                <a:spcPts val="800"/>
+              </a:spcAft>
+            </a:pPr>
+            <a:r>
+              <a:rPr sz="1100">
+                <a:rFonts a:eastAsia="Microsoft YaHei"/>
+                <a:solidFill>
+                  <a:srgbClr val="0C4A3E"/>
+                </a:solidFill>
+                <a:latin typeface="Calibri"/>
+              </a:rPr>
+              <a:t>●  </a:t>
+            </a:r>
+            <a:r>
+              <a:rPr sz="1100">
+                <a:rFonts a:eastAsia="Microsoft YaHei"/>
+                <a:solidFill>
+                  <a:srgbClr val="44403C"/>
+                </a:solidFill>
+                <a:latin typeface="Microsoft YaHei"/>
+              </a:rPr>
+              <a:t>行业拓展：4 Agent 框架复用至医疗、金融、合规</a:t>
+            </a:r>
+          </a:p>
+          <a:p>
+            <a:pPr algn="l">
+              <a:spcAft>
+                <a:spcPts val="800"/>
+              </a:spcAft>
+            </a:pPr>
+            <a:r>
+              <a:rPr sz="1100">
+                <a:rFonts a:eastAsia="Microsoft YaHei"/>
+                <a:solidFill>
+                  <a:srgbClr val="0C4A3E"/>
+                </a:solidFill>
+                <a:latin typeface="Calibri"/>
+              </a:rPr>
+              <a:t>●  </a:t>
+            </a:r>
+            <a:r>
+              <a:rPr sz="1100">
+                <a:rFonts a:eastAsia="Microsoft YaHei"/>
+                <a:solidFill>
+                  <a:srgbClr val="44403C"/>
+                </a:solidFill>
+                <a:latin typeface="Microsoft YaHei"/>
+              </a:rPr>
+              <a:t>生态建设：律所合作、政法高校联合实验室</a:t>
+            </a:r>
+          </a:p>
+        </p:txBody>
+      </p:sp>
+      <p:sp>
+        <p:nvSpPr>
+          <p:cNvPr id="25" name="Rectangle 24"/>
+          <p:cNvSpPr/>
+          <p:nvPr/>
+        </p:nvSpPr>
+        <p:spPr>
+          <a:xfrm>
+            <a:off x="457200" y="6263640"/>
+            <a:ext cx="11247120" cy="365760"/>
+          </a:xfrm>
+          <a:prstGeom prst="rect">
+            <a:avLst/>
+          </a:prstGeom>
+          <a:solidFill>
+            <a:srgbClr val="0C4A3E"/>
+          </a:solidFill>
+          <a:ln>
+            <a:noFill/>
+          </a:ln>
+          <a:effectLst/>
+        </p:spPr>
+        <p:style>
+          <a:lnRef idx="1">
+            <a:schemeClr val="accent1"/>
+          </a:lnRef>
+          <a:fillRef idx="3">
+            <a:schemeClr val="accent1"/>
+          </a:fillRef>
+          <a:effectRef idx="2">
+            <a:schemeClr val="accent1"/>
+          </a:effectRef>
+          <a:fontRef idx="minor">
+            <a:schemeClr val="lt1"/>
+          </a:fontRef>
+        </p:style>
+        <p:txBody>
+          <a:bodyPr rtlCol="0" anchor="ctr"/>
+          <a:lstStyle/>
+          <a:p>
+            <a:pPr algn="ctr"/>
+          </a:p>
+        </p:txBody>
+      </p:sp>
+      <p:sp>
+        <p:nvSpPr>
+          <p:cNvPr id="26" name="TextBox 25"/>
+          <p:cNvSpPr txBox="1"/>
+          <p:nvPr/>
+        </p:nvSpPr>
+        <p:spPr>
+          <a:xfrm>
+            <a:off x="457200" y="6263640"/>
+            <a:ext cx="11247120" cy="365760"/>
+          </a:xfrm>
+          <a:prstGeom prst="rect">
+            <a:avLst/>
+          </a:prstGeom>
+          <a:noFill/>
+        </p:spPr>
+        <p:txBody>
+          <a:bodyPr wrap="square" anchor="ctr">
+            <a:spAutoFit/>
+          </a:bodyPr>
+          <a:lstStyle/>
+          <a:p>
+            <a:pPr algn="ctr"/>
+            <a:r>
+              <a:rPr sz="1200" b="1">
+                <a:rFonts a:eastAsia="Microsoft YaHei" a:ascii="Microsoft YaHei" a:hAnsi="Microsoft YaHei"/>
+                <a:solidFill>
+                  <a:srgbClr val="FFFFFF"/>
+                </a:solidFill>
+                <a:latin typeface="Microsoft YaHei"/>
+              </a:rPr>
+              <a:t>从 MVP 验证 → 功能深化 → 规模落地  清晰的 3 阶段路线图</a:t>
+            </a:r>
+          </a:p>
+        </p:txBody>
+      </p:sp>
+      <p:sp>
+        <p:nvSpPr>
+          <p:cNvPr id="27" name="TextBox 26"/>
+          <p:cNvSpPr txBox="1"/>
+          <p:nvPr/>
+        </p:nvSpPr>
+        <p:spPr>
+          <a:xfrm>
+            <a:off x="457200" y="6492240"/>
+            <a:ext cx="10972800" cy="274320"/>
+          </a:xfrm>
+          <a:prstGeom prst="rect">
+            <a:avLst/>
+          </a:prstGeom>
+          <a:noFill/>
+        </p:spPr>
+        <p:txBody>
+          <a:bodyPr wrap="square" anchor="ctr">
+            <a:spAutoFit/>
+          </a:bodyPr>
+          <a:lstStyle/>
+          <a:p>
+            <a:pPr algn="l"/>
+            <a:r>
+              <a:rPr sz="900" b="0">
+                <a:rFonts a:eastAsia="Microsoft YaHei" a:ascii="Microsoft YaHei" a:hAnsi="Microsoft YaHei"/>
+                <a:solidFill>
+                  <a:srgbClr val="78716C"/>
+                </a:solidFill>
+                <a:latin typeface="Microsoft YaHei"/>
+              </a:rPr>
+              <a:t>律瞳 LegalLens · 律师专属的 AI 案件分析平台</a:t>
+            </a:r>
+          </a:p>
+        </p:txBody>
+      </p:sp>
+    </p:spTree>
+  </p:cSld>
+  <p:clrMapOvr>
+    <a:masterClrMapping/>
+  </p:clrMapOvr>
+</p:sld>
+</file>
+
+<file path=ppt/slides/slide16.xml><?xml version="1.0" encoding="utf-8"?>
+<p:sld xmlns:a="http://schemas.openxmlformats.org/drawingml/2006/main" xmlns:p="http://schemas.openxmlformats.org/presentationml/2006/main" xmlns:r="http://schemas.openxmlformats.org/officeDocument/2006/relationships">
+  <p:cSld>
+    <p:spTree>
+      <p:nvGrpSpPr>
+        <p:cNvPr id="1" name=""/>
+        <p:cNvGrpSpPr/>
+        <p:nvPr/>
+      </p:nvGrpSpPr>
+      <p:grpSpPr/>
+      <p:sp>
+        <p:nvSpPr>
+          <p:cNvPr id="2" name="Rectangle 1"/>
+          <p:cNvSpPr/>
+          <p:nvPr/>
+        </p:nvSpPr>
+        <p:spPr>
+          <a:xfrm>
+            <a:off x="0" y="0"/>
             <a:ext cx="12188952" cy="6858000"/>
           </a:xfrm>
           <a:prstGeom prst="rect">
@@ -6452,7 +9042,7 @@
                 </a:solidFill>
                 <a:latin typeface="Calibri"/>
               </a:rPr>
-              <a:t>2 / 14</a:t>
+              <a:t>2 / 16</a:t>
             </a:r>
           </a:p>
         </p:txBody>
@@ -7407,7 +9997,159 @@
       </p:sp>
       <p:sp>
         <p:nvSpPr>
-          <p:cNvPr id="30" name="TextBox 29"/>
+          <p:cNvPr id="30" name="Rectangle 29"/>
+          <p:cNvSpPr/>
+          <p:nvPr/>
+        </p:nvSpPr>
+        <p:spPr>
+          <a:xfrm>
+            <a:off x="731520" y="6400799"/>
+            <a:ext cx="822960" cy="640080"/>
+          </a:xfrm>
+          <a:prstGeom prst="rect">
+            <a:avLst/>
+          </a:prstGeom>
+          <a:solidFill>
+            <a:srgbClr val="F0FDF4"/>
+          </a:solidFill>
+          <a:ln>
+            <a:noFill/>
+          </a:ln>
+          <a:effectLst/>
+        </p:spPr>
+        <p:style>
+          <a:lnRef idx="1">
+            <a:schemeClr val="accent1"/>
+          </a:lnRef>
+          <a:fillRef idx="3">
+            <a:schemeClr val="accent1"/>
+          </a:fillRef>
+          <a:effectRef idx="2">
+            <a:schemeClr val="accent1"/>
+          </a:effectRef>
+          <a:fontRef idx="minor">
+            <a:schemeClr val="lt1"/>
+          </a:fontRef>
+        </p:style>
+        <p:txBody>
+          <a:bodyPr rtlCol="0" anchor="ctr"/>
+          <a:lstStyle/>
+          <a:p>
+            <a:pPr algn="ctr"/>
+          </a:p>
+        </p:txBody>
+      </p:sp>
+      <p:sp>
+        <p:nvSpPr>
+          <p:cNvPr id="31" name="TextBox 30"/>
+          <p:cNvSpPr txBox="1"/>
+          <p:nvPr/>
+        </p:nvSpPr>
+        <p:spPr>
+          <a:xfrm>
+            <a:off x="731520" y="6400799"/>
+            <a:ext cx="822960" cy="640080"/>
+          </a:xfrm>
+          <a:prstGeom prst="rect">
+            <a:avLst/>
+          </a:prstGeom>
+          <a:noFill/>
+        </p:spPr>
+        <p:txBody>
+          <a:bodyPr wrap="square" anchor="ctr">
+            <a:spAutoFit/>
+          </a:bodyPr>
+          <a:lstStyle/>
+          <a:p>
+            <a:pPr algn="ctr"/>
+            <a:r>
+              <a:rPr sz="2400" b="1">
+                <a:rFonts a:eastAsia="Calibri" a:ascii="Calibri" a:hAnsi="Calibri"/>
+                <a:solidFill>
+                  <a:srgbClr val="0C4A3E"/>
+                </a:solidFill>
+                <a:latin typeface="Calibri"/>
+              </a:rPr>
+              <a:t>07</a:t>
+            </a:r>
+          </a:p>
+        </p:txBody>
+      </p:sp>
+      <p:sp>
+        <p:nvSpPr>
+          <p:cNvPr id="32" name="TextBox 31"/>
+          <p:cNvSpPr txBox="1"/>
+          <p:nvPr/>
+        </p:nvSpPr>
+        <p:spPr>
+          <a:xfrm>
+            <a:off x="1828800" y="6400799"/>
+            <a:ext cx="4572000" cy="365760"/>
+          </a:xfrm>
+          <a:prstGeom prst="rect">
+            <a:avLst/>
+          </a:prstGeom>
+          <a:noFill/>
+        </p:spPr>
+        <p:txBody>
+          <a:bodyPr wrap="square" anchor="ctr">
+            <a:spAutoFit/>
+          </a:bodyPr>
+          <a:lstStyle/>
+          <a:p>
+            <a:pPr algn="l"/>
+            <a:r>
+              <a:rPr sz="2000" b="1">
+                <a:rFonts a:eastAsia="Microsoft YaHei" a:ascii="Microsoft YaHei" a:hAnsi="Microsoft YaHei"/>
+                <a:solidFill>
+                  <a:srgbClr val="1C1917"/>
+                </a:solidFill>
+                <a:latin typeface="Microsoft YaHei"/>
+              </a:rPr>
+              <a:t>合规边界 &amp; 落地计划</a:t>
+            </a:r>
+          </a:p>
+        </p:txBody>
+      </p:sp>
+      <p:sp>
+        <p:nvSpPr>
+          <p:cNvPr id="33" name="TextBox 32"/>
+          <p:cNvSpPr txBox="1"/>
+          <p:nvPr/>
+        </p:nvSpPr>
+        <p:spPr>
+          <a:xfrm>
+            <a:off x="1828800" y="6766559"/>
+            <a:ext cx="7315200" cy="274320"/>
+          </a:xfrm>
+          <a:prstGeom prst="rect">
+            <a:avLst/>
+          </a:prstGeom>
+          <a:noFill/>
+        </p:spPr>
+        <p:txBody>
+          <a:bodyPr wrap="square" anchor="ctr">
+            <a:spAutoFit/>
+          </a:bodyPr>
+          <a:lstStyle/>
+          <a:p>
+            <a:pPr algn="l"/>
+            <a:r>
+              <a:rPr sz="1200" b="0">
+                <a:rFonts a:eastAsia="Calibri" a:ascii="Calibri" a:hAnsi="Calibri"/>
+                <a:solidFill>
+                  <a:srgbClr val="78716C"/>
+                </a:solidFill>
+                <a:latin typeface="Calibri"/>
+              </a:rPr>
+              <a:t>Compliance &amp; Roadmap</a:t>
+            </a:r>
+          </a:p>
+        </p:txBody>
+      </p:sp>
+      <p:sp>
+        <p:nvSpPr>
+          <p:cNvPr id="34" name="TextBox 33"/>
           <p:cNvSpPr txBox="1"/>
           <p:nvPr/>
         </p:nvSpPr>
@@ -7570,7 +10312,7 @@
                 </a:solidFill>
                 <a:latin typeface="Calibri"/>
               </a:rPr>
-              <a:t>3 / 14</a:t>
+              <a:t>3 / 16</a:t>
             </a:r>
           </a:p>
         </p:txBody>
@@ -8601,7 +11343,7 @@
                 </a:solidFill>
                 <a:latin typeface="Calibri"/>
               </a:rPr>
-              <a:t>4 / 14</a:t>
+              <a:t>4 / 16</a:t>
             </a:r>
           </a:p>
         </p:txBody>
@@ -9288,7 +12030,7 @@
                 </a:solidFill>
                 <a:latin typeface="Calibri"/>
               </a:rPr>
-              <a:t>5 / 14</a:t>
+              <a:t>5 / 16</a:t>
             </a:r>
           </a:p>
         </p:txBody>
@@ -9554,7 +12296,7 @@
                 </a:solidFill>
                 <a:latin typeface="Calibri"/>
               </a:rPr>
-              <a:t>6 / 14</a:t>
+              <a:t>6 / 16</a:t>
             </a:r>
           </a:p>
         </p:txBody>
@@ -9820,7 +12562,7 @@
                 </a:solidFill>
                 <a:latin typeface="Calibri"/>
               </a:rPr>
-              <a:t>7 / 14</a:t>
+              <a:t>7 / 16</a:t>
             </a:r>
           </a:p>
         </p:txBody>
@@ -11317,7 +14059,7 @@
                 </a:solidFill>
                 <a:latin typeface="Calibri"/>
               </a:rPr>
-              <a:t>8 / 14</a:t>
+              <a:t>8 / 16</a:t>
             </a:r>
           </a:p>
         </p:txBody>
@@ -12189,7 +14931,7 @@
                 </a:solidFill>
                 <a:latin typeface="Calibri"/>
               </a:rPr>
-              <a:t>9 / 14</a:t>
+              <a:t>9 / 16</a:t>
             </a:r>
           </a:p>
         </p:txBody>

--- a/docs/律瞳-LegalLens-产品介绍.pptx
+++ b/docs/律瞳-LegalLens-产品介绍.pptx
@@ -9091,8 +9091,8 @@
         </p:nvSpPr>
         <p:spPr>
           <a:xfrm>
-            <a:off x="731520" y="1737360"/>
-            <a:ext cx="822960" cy="640080"/>
+            <a:off x="731520" y="1554480"/>
+            <a:ext cx="822960" cy="566928"/>
           </a:xfrm>
           <a:prstGeom prst="rect">
             <a:avLst/>
@@ -9135,8 +9135,8 @@
         </p:nvSpPr>
         <p:spPr>
           <a:xfrm>
-            <a:off x="731520" y="1737360"/>
-            <a:ext cx="822960" cy="640080"/>
+            <a:off x="731520" y="1554480"/>
+            <a:ext cx="822960" cy="566928"/>
           </a:xfrm>
           <a:prstGeom prst="rect">
             <a:avLst/>
@@ -9151,7 +9151,7 @@
           <a:p>
             <a:pPr algn="ctr"/>
             <a:r>
-              <a:rPr sz="2400" b="1">
+              <a:rPr sz="2200" b="1">
                 <a:rFonts a:eastAsia="Calibri" a:ascii="Calibri" a:hAnsi="Calibri"/>
                 <a:solidFill>
                   <a:srgbClr val="0C4A3E"/>
@@ -9171,8 +9171,8 @@
         </p:nvSpPr>
         <p:spPr>
           <a:xfrm>
-            <a:off x="1828800" y="1737360"/>
-            <a:ext cx="4572000" cy="365760"/>
+            <a:off x="1828800" y="1554480"/>
+            <a:ext cx="7315200" cy="320040"/>
           </a:xfrm>
           <a:prstGeom prst="rect">
             <a:avLst/>
@@ -9187,7 +9187,7 @@
           <a:p>
             <a:pPr algn="l"/>
             <a:r>
-              <a:rPr sz="2000" b="1">
+              <a:rPr sz="1800" b="1">
                 <a:rFonts a:eastAsia="Microsoft YaHei" a:ascii="Microsoft YaHei" a:hAnsi="Microsoft YaHei"/>
                 <a:solidFill>
                   <a:srgbClr val="1C1917"/>
@@ -9207,8 +9207,8 @@
         </p:nvSpPr>
         <p:spPr>
           <a:xfrm>
-            <a:off x="1828800" y="2103120"/>
-            <a:ext cx="7315200" cy="274320"/>
+            <a:off x="1828800" y="1874519"/>
+            <a:ext cx="7315200" cy="246888"/>
           </a:xfrm>
           <a:prstGeom prst="rect">
             <a:avLst/>
@@ -9223,7 +9223,7 @@
           <a:p>
             <a:pPr algn="l"/>
             <a:r>
-              <a:rPr sz="1200" b="0">
+              <a:rPr sz="1100" b="0">
                 <a:rFonts a:eastAsia="Calibri" a:ascii="Calibri" a:hAnsi="Calibri"/>
                 <a:solidFill>
                   <a:srgbClr val="78716C"/>
@@ -9243,8 +9243,8 @@
         </p:nvSpPr>
         <p:spPr>
           <a:xfrm>
-            <a:off x="731520" y="2514600"/>
-            <a:ext cx="822960" cy="640080"/>
+            <a:off x="731520" y="2212848"/>
+            <a:ext cx="822960" cy="566928"/>
           </a:xfrm>
           <a:prstGeom prst="rect">
             <a:avLst/>
@@ -9287,8 +9287,8 @@
         </p:nvSpPr>
         <p:spPr>
           <a:xfrm>
-            <a:off x="731520" y="2514600"/>
-            <a:ext cx="822960" cy="640080"/>
+            <a:off x="731520" y="2212848"/>
+            <a:ext cx="822960" cy="566928"/>
           </a:xfrm>
           <a:prstGeom prst="rect">
             <a:avLst/>
@@ -9303,7 +9303,7 @@
           <a:p>
             <a:pPr algn="ctr"/>
             <a:r>
-              <a:rPr sz="2400" b="1">
+              <a:rPr sz="2200" b="1">
                 <a:rFonts a:eastAsia="Calibri" a:ascii="Calibri" a:hAnsi="Calibri"/>
                 <a:solidFill>
                   <a:srgbClr val="0C4A3E"/>
@@ -9323,8 +9323,8 @@
         </p:nvSpPr>
         <p:spPr>
           <a:xfrm>
-            <a:off x="1828800" y="2514600"/>
-            <a:ext cx="4572000" cy="365760"/>
+            <a:off x="1828800" y="2212848"/>
+            <a:ext cx="7315200" cy="320040"/>
           </a:xfrm>
           <a:prstGeom prst="rect">
             <a:avLst/>
@@ -9339,7 +9339,7 @@
           <a:p>
             <a:pPr algn="l"/>
             <a:r>
-              <a:rPr sz="2000" b="1">
+              <a:rPr sz="1800" b="1">
                 <a:rFonts a:eastAsia="Microsoft YaHei" a:ascii="Microsoft YaHei" a:hAnsi="Microsoft YaHei"/>
                 <a:solidFill>
                   <a:srgbClr val="1C1917"/>
@@ -9359,8 +9359,8 @@
         </p:nvSpPr>
         <p:spPr>
           <a:xfrm>
-            <a:off x="1828800" y="2880360"/>
-            <a:ext cx="7315200" cy="274320"/>
+            <a:off x="1828800" y="2532888"/>
+            <a:ext cx="7315200" cy="246888"/>
           </a:xfrm>
           <a:prstGeom prst="rect">
             <a:avLst/>
@@ -9375,7 +9375,7 @@
           <a:p>
             <a:pPr algn="l"/>
             <a:r>
-              <a:rPr sz="1200" b="0">
+              <a:rPr sz="1100" b="0">
                 <a:rFonts a:eastAsia="Calibri" a:ascii="Calibri" a:hAnsi="Calibri"/>
                 <a:solidFill>
                   <a:srgbClr val="78716C"/>
@@ -9395,8 +9395,8 @@
         </p:nvSpPr>
         <p:spPr>
           <a:xfrm>
-            <a:off x="731520" y="3291840"/>
-            <a:ext cx="822960" cy="640080"/>
+            <a:off x="731520" y="2871215"/>
+            <a:ext cx="822960" cy="566928"/>
           </a:xfrm>
           <a:prstGeom prst="rect">
             <a:avLst/>
@@ -9439,8 +9439,8 @@
         </p:nvSpPr>
         <p:spPr>
           <a:xfrm>
-            <a:off x="731520" y="3291840"/>
-            <a:ext cx="822960" cy="640080"/>
+            <a:off x="731520" y="2871215"/>
+            <a:ext cx="822960" cy="566928"/>
           </a:xfrm>
           <a:prstGeom prst="rect">
             <a:avLst/>
@@ -9455,7 +9455,7 @@
           <a:p>
             <a:pPr algn="ctr"/>
             <a:r>
-              <a:rPr sz="2400" b="1">
+              <a:rPr sz="2200" b="1">
                 <a:rFonts a:eastAsia="Calibri" a:ascii="Calibri" a:hAnsi="Calibri"/>
                 <a:solidFill>
                   <a:srgbClr val="0C4A3E"/>
@@ -9475,8 +9475,8 @@
         </p:nvSpPr>
         <p:spPr>
           <a:xfrm>
-            <a:off x="1828800" y="3291840"/>
-            <a:ext cx="4572000" cy="365760"/>
+            <a:off x="1828800" y="2871215"/>
+            <a:ext cx="7315200" cy="320040"/>
           </a:xfrm>
           <a:prstGeom prst="rect">
             <a:avLst/>
@@ -9491,7 +9491,7 @@
           <a:p>
             <a:pPr algn="l"/>
             <a:r>
-              <a:rPr sz="2000" b="1">
+              <a:rPr sz="1800" b="1">
                 <a:rFonts a:eastAsia="Microsoft YaHei" a:ascii="Microsoft YaHei" a:hAnsi="Microsoft YaHei"/>
                 <a:solidFill>
                   <a:srgbClr val="1C1917"/>
@@ -9511,8 +9511,8 @@
         </p:nvSpPr>
         <p:spPr>
           <a:xfrm>
-            <a:off x="1828800" y="3657600"/>
-            <a:ext cx="7315200" cy="274320"/>
+            <a:off x="1828800" y="3191256"/>
+            <a:ext cx="7315200" cy="246888"/>
           </a:xfrm>
           <a:prstGeom prst="rect">
             <a:avLst/>
@@ -9527,7 +9527,7 @@
           <a:p>
             <a:pPr algn="l"/>
             <a:r>
-              <a:rPr sz="1200" b="0">
+              <a:rPr sz="1100" b="0">
                 <a:rFonts a:eastAsia="Calibri" a:ascii="Calibri" a:hAnsi="Calibri"/>
                 <a:solidFill>
                   <a:srgbClr val="78716C"/>
@@ -9547,8 +9547,8 @@
         </p:nvSpPr>
         <p:spPr>
           <a:xfrm>
-            <a:off x="731520" y="4069080"/>
-            <a:ext cx="822960" cy="640080"/>
+            <a:off x="731520" y="3529583"/>
+            <a:ext cx="822960" cy="566928"/>
           </a:xfrm>
           <a:prstGeom prst="rect">
             <a:avLst/>
@@ -9591,8 +9591,8 @@
         </p:nvSpPr>
         <p:spPr>
           <a:xfrm>
-            <a:off x="731520" y="4069080"/>
-            <a:ext cx="822960" cy="640080"/>
+            <a:off x="731520" y="3529583"/>
+            <a:ext cx="822960" cy="566928"/>
           </a:xfrm>
           <a:prstGeom prst="rect">
             <a:avLst/>
@@ -9607,7 +9607,7 @@
           <a:p>
             <a:pPr algn="ctr"/>
             <a:r>
-              <a:rPr sz="2400" b="1">
+              <a:rPr sz="2200" b="1">
                 <a:rFonts a:eastAsia="Calibri" a:ascii="Calibri" a:hAnsi="Calibri"/>
                 <a:solidFill>
                   <a:srgbClr val="0C4A3E"/>
@@ -9627,8 +9627,8 @@
         </p:nvSpPr>
         <p:spPr>
           <a:xfrm>
-            <a:off x="1828800" y="4069080"/>
-            <a:ext cx="4572000" cy="365760"/>
+            <a:off x="1828800" y="3529583"/>
+            <a:ext cx="7315200" cy="320040"/>
           </a:xfrm>
           <a:prstGeom prst="rect">
             <a:avLst/>
@@ -9643,7 +9643,7 @@
           <a:p>
             <a:pPr algn="l"/>
             <a:r>
-              <a:rPr sz="2000" b="1">
+              <a:rPr sz="1800" b="1">
                 <a:rFonts a:eastAsia="Microsoft YaHei" a:ascii="Microsoft YaHei" a:hAnsi="Microsoft YaHei"/>
                 <a:solidFill>
                   <a:srgbClr val="1C1917"/>
@@ -9663,8 +9663,8 @@
         </p:nvSpPr>
         <p:spPr>
           <a:xfrm>
-            <a:off x="1828800" y="4434840"/>
-            <a:ext cx="7315200" cy="274320"/>
+            <a:off x="1828800" y="3849623"/>
+            <a:ext cx="7315200" cy="246888"/>
           </a:xfrm>
           <a:prstGeom prst="rect">
             <a:avLst/>
@@ -9679,7 +9679,7 @@
           <a:p>
             <a:pPr algn="l"/>
             <a:r>
-              <a:rPr sz="1200" b="0">
+              <a:rPr sz="1100" b="0">
                 <a:rFonts a:eastAsia="Calibri" a:ascii="Calibri" a:hAnsi="Calibri"/>
                 <a:solidFill>
                   <a:srgbClr val="78716C"/>
@@ -9699,8 +9699,8 @@
         </p:nvSpPr>
         <p:spPr>
           <a:xfrm>
-            <a:off x="731520" y="4846320"/>
-            <a:ext cx="822960" cy="640080"/>
+            <a:off x="731520" y="4187951"/>
+            <a:ext cx="822960" cy="566928"/>
           </a:xfrm>
           <a:prstGeom prst="rect">
             <a:avLst/>
@@ -9743,8 +9743,8 @@
         </p:nvSpPr>
         <p:spPr>
           <a:xfrm>
-            <a:off x="731520" y="4846320"/>
-            <a:ext cx="822960" cy="640080"/>
+            <a:off x="731520" y="4187951"/>
+            <a:ext cx="822960" cy="566928"/>
           </a:xfrm>
           <a:prstGeom prst="rect">
             <a:avLst/>
@@ -9759,7 +9759,7 @@
           <a:p>
             <a:pPr algn="ctr"/>
             <a:r>
-              <a:rPr sz="2400" b="1">
+              <a:rPr sz="2200" b="1">
                 <a:rFonts a:eastAsia="Calibri" a:ascii="Calibri" a:hAnsi="Calibri"/>
                 <a:solidFill>
                   <a:srgbClr val="0C4A3E"/>
@@ -9779,8 +9779,8 @@
         </p:nvSpPr>
         <p:spPr>
           <a:xfrm>
-            <a:off x="1828800" y="4846320"/>
-            <a:ext cx="4572000" cy="365760"/>
+            <a:off x="1828800" y="4187951"/>
+            <a:ext cx="7315200" cy="320040"/>
           </a:xfrm>
           <a:prstGeom prst="rect">
             <a:avLst/>
@@ -9795,7 +9795,7 @@
           <a:p>
             <a:pPr algn="l"/>
             <a:r>
-              <a:rPr sz="2000" b="1">
+              <a:rPr sz="1800" b="1">
                 <a:rFonts a:eastAsia="Microsoft YaHei" a:ascii="Microsoft YaHei" a:hAnsi="Microsoft YaHei"/>
                 <a:solidFill>
                   <a:srgbClr val="1C1917"/>
@@ -9815,8 +9815,8 @@
         </p:nvSpPr>
         <p:spPr>
           <a:xfrm>
-            <a:off x="1828800" y="5212080"/>
-            <a:ext cx="7315200" cy="274320"/>
+            <a:off x="1828800" y="4507991"/>
+            <a:ext cx="7315200" cy="246888"/>
           </a:xfrm>
           <a:prstGeom prst="rect">
             <a:avLst/>
@@ -9831,7 +9831,7 @@
           <a:p>
             <a:pPr algn="l"/>
             <a:r>
-              <a:rPr sz="1200" b="0">
+              <a:rPr sz="1100" b="0">
                 <a:rFonts a:eastAsia="Calibri" a:ascii="Calibri" a:hAnsi="Calibri"/>
                 <a:solidFill>
                   <a:srgbClr val="78716C"/>
@@ -9851,8 +9851,8 @@
         </p:nvSpPr>
         <p:spPr>
           <a:xfrm>
-            <a:off x="731520" y="5623559"/>
-            <a:ext cx="822960" cy="640080"/>
+            <a:off x="731520" y="4846319"/>
+            <a:ext cx="822960" cy="566928"/>
           </a:xfrm>
           <a:prstGeom prst="rect">
             <a:avLst/>
@@ -9895,8 +9895,8 @@
         </p:nvSpPr>
         <p:spPr>
           <a:xfrm>
-            <a:off x="731520" y="5623559"/>
-            <a:ext cx="822960" cy="640080"/>
+            <a:off x="731520" y="4846319"/>
+            <a:ext cx="822960" cy="566928"/>
           </a:xfrm>
           <a:prstGeom prst="rect">
             <a:avLst/>
@@ -9911,7 +9911,7 @@
           <a:p>
             <a:pPr algn="ctr"/>
             <a:r>
-              <a:rPr sz="2400" b="1">
+              <a:rPr sz="2200" b="1">
                 <a:rFonts a:eastAsia="Calibri" a:ascii="Calibri" a:hAnsi="Calibri"/>
                 <a:solidFill>
                   <a:srgbClr val="0C4A3E"/>
@@ -9931,8 +9931,8 @@
         </p:nvSpPr>
         <p:spPr>
           <a:xfrm>
-            <a:off x="1828800" y="5623559"/>
-            <a:ext cx="4572000" cy="365760"/>
+            <a:off x="1828800" y="4846319"/>
+            <a:ext cx="7315200" cy="320040"/>
           </a:xfrm>
           <a:prstGeom prst="rect">
             <a:avLst/>
@@ -9947,7 +9947,7 @@
           <a:p>
             <a:pPr algn="l"/>
             <a:r>
-              <a:rPr sz="2000" b="1">
+              <a:rPr sz="1800" b="1">
                 <a:rFonts a:eastAsia="Microsoft YaHei" a:ascii="Microsoft YaHei" a:hAnsi="Microsoft YaHei"/>
                 <a:solidFill>
                   <a:srgbClr val="1C1917"/>
@@ -9967,8 +9967,8 @@
         </p:nvSpPr>
         <p:spPr>
           <a:xfrm>
-            <a:off x="1828800" y="5989320"/>
-            <a:ext cx="7315200" cy="274320"/>
+            <a:off x="1828800" y="5166359"/>
+            <a:ext cx="7315200" cy="246888"/>
           </a:xfrm>
           <a:prstGeom prst="rect">
             <a:avLst/>
@@ -9983,7 +9983,7 @@
           <a:p>
             <a:pPr algn="l"/>
             <a:r>
-              <a:rPr sz="1200" b="0">
+              <a:rPr sz="1100" b="0">
                 <a:rFonts a:eastAsia="Calibri" a:ascii="Calibri" a:hAnsi="Calibri"/>
                 <a:solidFill>
                   <a:srgbClr val="78716C"/>
@@ -10003,8 +10003,8 @@
         </p:nvSpPr>
         <p:spPr>
           <a:xfrm>
-            <a:off x="731520" y="6400799"/>
-            <a:ext cx="822960" cy="640080"/>
+            <a:off x="731520" y="5504687"/>
+            <a:ext cx="822960" cy="566928"/>
           </a:xfrm>
           <a:prstGeom prst="rect">
             <a:avLst/>
@@ -10047,8 +10047,8 @@
         </p:nvSpPr>
         <p:spPr>
           <a:xfrm>
-            <a:off x="731520" y="6400799"/>
-            <a:ext cx="822960" cy="640080"/>
+            <a:off x="731520" y="5504687"/>
+            <a:ext cx="822960" cy="566928"/>
           </a:xfrm>
           <a:prstGeom prst="rect">
             <a:avLst/>
@@ -10063,7 +10063,7 @@
           <a:p>
             <a:pPr algn="ctr"/>
             <a:r>
-              <a:rPr sz="2400" b="1">
+              <a:rPr sz="2200" b="1">
                 <a:rFonts a:eastAsia="Calibri" a:ascii="Calibri" a:hAnsi="Calibri"/>
                 <a:solidFill>
                   <a:srgbClr val="0C4A3E"/>
@@ -10083,8 +10083,8 @@
         </p:nvSpPr>
         <p:spPr>
           <a:xfrm>
-            <a:off x="1828800" y="6400799"/>
-            <a:ext cx="4572000" cy="365760"/>
+            <a:off x="1828800" y="5504687"/>
+            <a:ext cx="7315200" cy="320040"/>
           </a:xfrm>
           <a:prstGeom prst="rect">
             <a:avLst/>
@@ -10099,7 +10099,7 @@
           <a:p>
             <a:pPr algn="l"/>
             <a:r>
-              <a:rPr sz="2000" b="1">
+              <a:rPr sz="1800" b="1">
                 <a:rFonts a:eastAsia="Microsoft YaHei" a:ascii="Microsoft YaHei" a:hAnsi="Microsoft YaHei"/>
                 <a:solidFill>
                   <a:srgbClr val="1C1917"/>
@@ -10119,8 +10119,8 @@
         </p:nvSpPr>
         <p:spPr>
           <a:xfrm>
-            <a:off x="1828800" y="6766559"/>
-            <a:ext cx="7315200" cy="274320"/>
+            <a:off x="1828800" y="5824727"/>
+            <a:ext cx="7315200" cy="246888"/>
           </a:xfrm>
           <a:prstGeom prst="rect">
             <a:avLst/>
@@ -10135,7 +10135,7 @@
           <a:p>
             <a:pPr algn="l"/>
             <a:r>
-              <a:rPr sz="1200" b="0">
+              <a:rPr sz="1100" b="0">
                 <a:rFonts a:eastAsia="Calibri" a:ascii="Calibri" a:hAnsi="Calibri"/>
                 <a:solidFill>
                   <a:srgbClr val="78716C"/>

--- a/docs/律瞳-LegalLens-产品介绍.pptx
+++ b/docs/律瞳-LegalLens-产品介绍.pptx
@@ -3199,6 +3199,42 @@
         </p:nvSpPr>
         <p:spPr>
           <a:xfrm>
+            <a:off x="457200" y="1554480"/>
+            <a:ext cx="10972800" cy="548640"/>
+          </a:xfrm>
+          <a:prstGeom prst="rect">
+            <a:avLst/>
+          </a:prstGeom>
+          <a:noFill/>
+        </p:spPr>
+        <p:txBody>
+          <a:bodyPr wrap="square" anchor="ctr">
+            <a:spAutoFit/>
+          </a:bodyPr>
+          <a:lstStyle/>
+          <a:p>
+            <a:pPr algn="ctr"/>
+            <a:r>
+              <a:rPr sz="1400" b="0">
+                <a:rFonts a:eastAsia="Microsoft YaHei" a:ascii="Microsoft YaHei" a:hAnsi="Microsoft YaHei"/>
+                <a:solidFill>
+                  <a:srgbClr val="E7E5E4"/>
+                </a:solidFill>
+                <a:latin typeface="Microsoft YaHei"/>
+              </a:rPr>
+              <a:t>GOAI 2026  ·  无界应用赛道  ·  AI+金融</a:t>
+            </a:r>
+          </a:p>
+        </p:txBody>
+      </p:sp>
+      <p:sp>
+        <p:nvSpPr>
+          <p:cNvPr id="5" name="TextBox 4"/>
+          <p:cNvSpPr txBox="1"/>
+          <p:nvPr/>
+        </p:nvSpPr>
+        <p:spPr>
+          <a:xfrm>
             <a:off x="457200" y="2011680"/>
             <a:ext cx="10972800" cy="1097280"/>
           </a:xfrm>
@@ -3229,14 +3265,14 @@
       </p:sp>
       <p:sp>
         <p:nvSpPr>
-          <p:cNvPr id="5" name="TextBox 4"/>
+          <p:cNvPr id="6" name="TextBox 5"/>
           <p:cNvSpPr txBox="1"/>
           <p:nvPr/>
         </p:nvSpPr>
         <p:spPr>
           <a:xfrm>
             <a:off x="457200" y="3017520"/>
-            <a:ext cx="10972800" cy="731520"/>
+            <a:ext cx="10972800" cy="640080"/>
           </a:xfrm>
           <a:prstGeom prst="rect">
             <a:avLst/>
@@ -3251,21 +3287,21 @@
           <a:p>
             <a:pPr algn="ctr"/>
             <a:r>
-              <a:rPr sz="2800" b="0">
+              <a:rPr sz="2600" b="0">
                 <a:rFonts a:eastAsia="Microsoft YaHei" a:ascii="Microsoft YaHei" a:hAnsi="Microsoft YaHei"/>
                 <a:solidFill>
                   <a:srgbClr val="F0FDF4"/>
                 </a:solidFill>
                 <a:latin typeface="Microsoft YaHei"/>
               </a:rPr>
-              <a:t>律师专属的 AI 案件分析平台</a:t>
-            </a:r>
-          </a:p>
-        </p:txBody>
-      </p:sp>
-      <p:sp>
-        <p:nvSpPr>
-          <p:cNvPr id="6" name="TextBox 5"/>
+              <a:t>律师 / 金融从业者的 AI 案件分析平台</a:t>
+            </a:r>
+          </a:p>
+        </p:txBody>
+      </p:sp>
+      <p:sp>
+        <p:nvSpPr>
+          <p:cNvPr id="7" name="TextBox 6"/>
           <p:cNvSpPr txBox="1"/>
           <p:nvPr/>
         </p:nvSpPr>
@@ -3294,14 +3330,50 @@
                 </a:solidFill>
                 <a:latin typeface="Calibri"/>
               </a:rPr>
-              <a:t>AI Case Analysis Platform Built for Lawyers</a:t>
-            </a:r>
-          </a:p>
-        </p:txBody>
-      </p:sp>
-      <p:sp>
-        <p:nvSpPr>
-          <p:cNvPr id="7" name="TextBox 6"/>
+              <a:t>AI Case Analysis Platform for Legal &amp; Finance Professionals</a:t>
+            </a:r>
+          </a:p>
+        </p:txBody>
+      </p:sp>
+      <p:sp>
+        <p:nvSpPr>
+          <p:cNvPr id="8" name="TextBox 7"/>
+          <p:cNvSpPr txBox="1"/>
+          <p:nvPr/>
+        </p:nvSpPr>
+        <p:spPr>
+          <a:xfrm>
+            <a:off x="457200" y="4572000"/>
+            <a:ext cx="10972800" cy="365760"/>
+          </a:xfrm>
+          <a:prstGeom prst="rect">
+            <a:avLst/>
+          </a:prstGeom>
+          <a:noFill/>
+        </p:spPr>
+        <p:txBody>
+          <a:bodyPr wrap="square" anchor="ctr">
+            <a:spAutoFit/>
+          </a:bodyPr>
+          <a:lstStyle/>
+          <a:p>
+            <a:pPr algn="ctr"/>
+            <a:r>
+              <a:rPr sz="1200" b="0">
+                <a:rFonts a:eastAsia="Microsoft YaHei" a:ascii="Microsoft YaHei" a:hAnsi="Microsoft YaHei"/>
+                <a:solidFill>
+                  <a:srgbClr val="F0FDF4"/>
+                </a:solidFill>
+                <a:latin typeface="Microsoft YaHei"/>
+              </a:rPr>
+              <a:t>覆盖：金融借款 · 信用卡 · 保险理赔 · 证券虚假陈述 · 银行理财 · 个人金融信息保护</a:t>
+            </a:r>
+          </a:p>
+        </p:txBody>
+      </p:sp>
+      <p:sp>
+        <p:nvSpPr>
+          <p:cNvPr id="9" name="TextBox 8"/>
           <p:cNvSpPr txBox="1"/>
           <p:nvPr/>
         </p:nvSpPr>
@@ -3493,14 +3565,14 @@
           <a:p>
             <a:pPr algn="l"/>
             <a:r>
-              <a:rPr sz="2600" b="1">
+              <a:rPr sz="2400" b="1">
                 <a:rFonts a:eastAsia="Microsoft YaHei" a:ascii="Microsoft YaHei" a:hAnsi="Microsoft YaHei"/>
                 <a:solidFill>
                   <a:srgbClr val="0C4A3E"/>
                 </a:solidFill>
                 <a:latin typeface="Microsoft YaHei"/>
               </a:rPr>
-              <a:t>场景 3：律师审查劳动合同</a:t>
+              <a:t>场景 3：保险公司快速理赔审查</a:t>
             </a:r>
           </a:p>
         </p:txBody>
@@ -3536,7 +3608,7 @@
                 </a:solidFill>
                 <a:latin typeface="Calibri"/>
               </a:rPr>
-              <a:t>Scenario 3: Contract Review</a:t>
+              <a:t>Scenario 3: Insurance Claim Review</a:t>
             </a:r>
           </a:p>
         </p:txBody>
@@ -3660,7 +3732,7 @@
                 </a:solidFill>
                 <a:latin typeface="Microsoft YaHei"/>
               </a:rPr>
-              <a:t>👤  张律 · 律师</a:t>
+              <a:t>👤  王经理 · 某财险公司理赔部</a:t>
             </a:r>
           </a:p>
         </p:txBody>
@@ -3732,7 +3804,7 @@
                 </a:solidFill>
                 <a:latin typeface="Microsoft YaHei"/>
               </a:rPr>
-              <a:t>客户（用人单位）要审一份新拟的劳动合同，需要快速识别风险点。</a:t>
+              <a:t>客户李某车辆被高空坠物砸损 9.8 万，车主索赔。需要快速判断是正常赔付还是拒赔。</a:t>
             </a:r>
           </a:p>
         </p:txBody>
@@ -3804,7 +3876,7 @@
                 </a:solidFill>
                 <a:latin typeface="Microsoft YaHei"/>
               </a:rPr>
-              <a:t>粘贴合同全文 → 选「合同类型：劳动合同」+「审查立场：对方」→ 开始审查</a:t>
+              <a:t>上传保单 + 事故现场照片 + 出警记录 → 选「合同类型：车险」→ 开始审查</a:t>
             </a:r>
           </a:p>
         </p:txBody>
@@ -3978,7 +4050,7 @@
                 </a:solidFill>
                 <a:latin typeface="Microsoft YaHei"/>
               </a:rPr>
-              <a:t>⚠️ 高风险 — 发现 1 个高风险 + 1 个中等风险条款</a:t>
+              <a:t>✅ 正常赔付 — 未发现拒赔依据</a:t>
             </a:r>
           </a:p>
           <a:p>
@@ -4005,7 +4077,7 @@
                 </a:solidFill>
                 <a:latin typeface="Microsoft YaHei"/>
               </a:rPr>
-              <a:t>AI 综合分析：争议解决缺失 / 违约金 100 万过高 / 竞业限制无补偿金</a:t>
+              <a:t>AI 综合分析：事故发生在保险期间 / 属于保险责任范围 / 保险公司无明确拒赔依据</a:t>
             </a:r>
           </a:p>
           <a:p>
@@ -4032,7 +4104,7 @@
                 </a:solidFill>
                 <a:latin typeface="Microsoft YaHei"/>
               </a:rPr>
-              <a:t>重点关注：第四条 竞业限制 — 未约定补偿金，可能被认定无效</a:t>
+              <a:t>重点关注：保险公司以「事故发生地不在约定区域」拒赔 (违反《保险法》第 23 条 [1])</a:t>
             </a:r>
           </a:p>
           <a:p>
@@ -4059,7 +4131,7 @@
                 </a:solidFill>
                 <a:latin typeface="Microsoft YaHei"/>
               </a:rPr>
-              <a:t>重点关注：第五条 违约责任 — 100 万远超实际损失</a:t>
+              <a:t>重点关注：保险单未载明区域限制，无约定即无拒赔理由</a:t>
             </a:r>
           </a:p>
           <a:p>
@@ -4086,7 +4158,7 @@
                 </a:solidFill>
                 <a:latin typeface="Microsoft YaHei"/>
               </a:rPr>
-              <a:t>缺失条款：工作时间 / 五险一金 / 试用期 / 解除条件</a:t>
+              <a:t>类案参考：(2022)粤 01 民终 9012 号 [2] 类似案件法院判保险公司全额赔付</a:t>
             </a:r>
           </a:p>
         </p:txBody>
@@ -4166,7 +4238,7 @@
                 </a:solidFill>
                 <a:latin typeface="Microsoft YaHei"/>
               </a:rPr>
-              <a:t>💡 效率提升：1 小时 → 30 秒  （合同审查时间）</a:t>
+              <a:t>💡 效率提升：30 分钟 → 20 秒  （保险理赔预审时间）</a:t>
             </a:r>
           </a:p>
         </p:txBody>
@@ -4202,7 +4274,7 @@
                 </a:solidFill>
                 <a:latin typeface="Microsoft YaHei"/>
               </a:rPr>
-              <a:t>律瞳 LegalLens · 律师专属的 AI 案件分析平台</a:t>
+              <a:t>律瞳 LegalLens · 律师/金融从业者的 AI 风险研判平台</a:t>
             </a:r>
           </a:p>
         </p:txBody>
@@ -4408,7 +4480,7 @@
                 </a:solidFill>
                 <a:latin typeface="Microsoft YaHei"/>
               </a:rPr>
-              <a:t>5 层架构：用户层 / 前端层 / 后端层 / AI 层 / 数据层</a:t>
+              <a:t>5 层架构：用户层 / 前端层 / 后端层 / AI 层 / 数据层  ·  7 部金融法规 + 30 个金融判例</a:t>
             </a:r>
           </a:p>
         </p:txBody>
@@ -4468,7 +4540,7 @@
                 </a:solidFill>
                 <a:latin typeface="Microsoft YaHei"/>
               </a:rPr>
-              <a:t>律瞳 LegalLens · 律师专属的 AI 案件分析平台</a:t>
+              <a:t>律瞳 LegalLens · 律师/金融从业者的 AI 风险研判平台</a:t>
             </a:r>
           </a:p>
         </p:txBody>
@@ -4674,7 +4746,7 @@
                 </a:solidFill>
                 <a:latin typeface="Calibri"/>
               </a:rPr>
-              <a:t>5 Layers: User / Frontend / Backend / AI / Data</a:t>
+              <a:t>5 Layers: User / Frontend / Backend / AI / Data  ·  7 Finance Regulations + 30 Finance Cases</a:t>
             </a:r>
           </a:p>
         </p:txBody>
@@ -4734,7 +4806,7 @@
                 </a:solidFill>
                 <a:latin typeface="Microsoft YaHei"/>
               </a:rPr>
-              <a:t>律瞳 LegalLens · 律师专属的 AI 案件分析平台</a:t>
+              <a:t>律瞳 LegalLens · 律师/金融从业者的 AI 风险研判平台</a:t>
             </a:r>
           </a:p>
         </p:txBody>
@@ -4976,7 +5048,7 @@
                 </a:solidFill>
                 <a:latin typeface="Microsoft YaHei"/>
               </a:rPr>
-              <a:t>vs 传统法律 AI 助手</a:t>
+              <a:t>vs 传统法律/金融 AI 助手</a:t>
             </a:r>
           </a:p>
         </p:txBody>
@@ -5164,7 +5236,7 @@
                           </a:solidFill>
                           <a:latin typeface="Microsoft YaHei"/>
                         </a:rPr>
-                        <a:t>26 法律 + 30 判例</a:t>
+                        <a:t>33 法规 + 60 判例</a:t>
                       </a:r>
                     </a:p>
                   </a:txBody>
@@ -5230,7 +5302,7 @@
                           </a:solidFill>
                           <a:latin typeface="Microsoft YaHei"/>
                         </a:rPr>
-                        <a:t>场景</a:t>
+                        <a:t>双行业</a:t>
                       </a:r>
                     </a:p>
                   </a:txBody>
@@ -5248,7 +5320,7 @@
                           </a:solidFill>
                           <a:latin typeface="Microsoft YaHei"/>
                         </a:rPr>
-                        <a:t>分析/检索/审查/知识库</a:t>
+                        <a:t>金融 + 法律</a:t>
                       </a:r>
                     </a:p>
                   </a:txBody>
@@ -5450,7 +5522,7 @@
                 </a:solidFill>
                 <a:latin typeface="Microsoft YaHei"/>
               </a:rPr>
-              <a:t>让律师敢用</a:t>
+              <a:t>让客户经理敢用</a:t>
             </a:r>
           </a:p>
         </p:txBody>
@@ -5683,8 +5755,8 @@
                 </a:solidFill>
                 <a:latin typeface="Microsoft YaHei"/>
               </a:rPr>
-              <a:t>法律条文是公开的，不需要训练
-训练数据可能过时，RAG 实时更新</a:t>
+              <a:t>金融法规是公开的，不需要训练
+RAG 实时更新、引用可溯源</a:t>
             </a:r>
           </a:p>
         </p:txBody>
@@ -5880,7 +5952,7 @@
                 </a:solidFill>
                 <a:latin typeface="Microsoft YaHei"/>
               </a:rPr>
-              <a:t>律师最大痛点是"不敢用"
+              <a:t>金融最大痛点是"不敢用"
 核心原则：可验证、可追溯</a:t>
             </a:r>
           </a:p>
@@ -5962,7 +6034,7 @@
                 <a:latin typeface="Microsoft YaHei"/>
               </a:rPr>
               <a:t>让 AI 做 AI 擅长的事——海量检索、模式识别、多视角校验
-让律师做律师擅长的事——专业判断、当事人沟通、诉讼策略</a:t>
+让金融从业者做金融擅长的事——客户沟通、风险判断、合规决策</a:t>
             </a:r>
           </a:p>
         </p:txBody>
@@ -5998,7 +6070,7 @@
                 </a:solidFill>
                 <a:latin typeface="Microsoft YaHei"/>
               </a:rPr>
-              <a:t>律瞳 LegalLens · 律师专属的 AI 案件分析平台</a:t>
+              <a:t>律瞳 LegalLens · 律师/金融从业者的 AI 风险研判平台</a:t>
             </a:r>
           </a:p>
         </p:txBody>
@@ -6197,14 +6269,14 @@
           <a:p>
             <a:pPr algn="l"/>
             <a:r>
-              <a:rPr sz="1200" b="0">
+              <a:rPr sz="1100" b="0">
                 <a:rFonts a:eastAsia="Microsoft YaHei" a:ascii="Microsoft YaHei" a:hAnsi="Microsoft YaHei"/>
                 <a:solidFill>
                   <a:srgbClr val="78716C"/>
                 </a:solidFill>
                 <a:latin typeface="Microsoft YaHei"/>
               </a:rPr>
-              <a:t>律瞳严格遵守《生成式人工智能服务管理暂行办法》及数据安全相关法规</a:t>
+              <a:t>律瞳严格遵守《生成式人工智能服务管理暂行办法》《商业银行法》《证券法》《保险法》《个人金融信息保护试行办法》等法规</a:t>
             </a:r>
           </a:p>
         </p:txBody>
@@ -6672,7 +6744,8 @@
               </a:rPr>
               <a:t>用户密码 bcrypt 加密
 JWT Token HS256 签名
-HTTPS 全程加密传输</a:t>
+HTTPS 全程加密传输
+遵守《个人金融信息保护试行办法》</a:t>
             </a:r>
           </a:p>
         </p:txBody>
@@ -6906,7 +6979,7 @@
               </a:rPr>
               <a:t>用户服务协议 · 隐私政策
 法律免责声明 · 数据来源说明
-7 份完整合规材料已就位</a:t>
+金融场景专属合规说明</a:t>
             </a:r>
           </a:p>
         </p:txBody>
@@ -7138,9 +7211,9 @@
                 </a:solidFill>
                 <a:latin typeface="Microsoft YaHei"/>
               </a:rPr>
-              <a:t>律瞳为辅助工具，不替代律师专业判断
+              <a:t>律瞳为辅助工具，不替代专业判断
 所有分析结果仅供参考
-最终决策由持证律师作出</a:t>
+最终决策由持证律师/金融从业者作出</a:t>
             </a:r>
           </a:p>
         </p:txBody>
@@ -7256,7 +7329,7 @@
                 </a:solidFill>
                 <a:latin typeface="Microsoft YaHei"/>
               </a:rPr>
-              <a:t>律瞳 LegalLens · 律师专属的 AI 案件分析平台</a:t>
+              <a:t>律瞳 LegalLens · 律师/金融从业者的 AI 风险研判平台</a:t>
             </a:r>
           </a:p>
         </p:txBody>
@@ -7735,7 +7808,7 @@
                 </a:solidFill>
                 <a:latin typeface="Microsoft YaHei"/>
               </a:rPr>
-              <a:t>26 部法律 + 30 真实判例知识库</a:t>
+              <a:t>7 部金融法规 + 26 部法律 + 60 判例知识库</a:t>
             </a:r>
           </a:p>
           <a:p>
@@ -7976,7 +8049,7 @@
                 </a:solidFill>
                 <a:latin typeface="Microsoft YaHei"/>
               </a:rPr>
-              <a:t>功能深化</a:t>
+              <a:t>金融场景深化</a:t>
             </a:r>
           </a:p>
         </p:txBody>
@@ -8012,7 +8085,7 @@
                 </a:solidFill>
                 <a:latin typeface="Calibri"/>
               </a:rPr>
-              <a:t>Feature Enhancement</a:t>
+              <a:t>Finance Enhancement</a:t>
             </a:r>
           </a:p>
         </p:txBody>
@@ -8062,7 +8135,7 @@
                 </a:solidFill>
                 <a:latin typeface="Microsoft YaHei"/>
               </a:rPr>
-              <a:t>Obsidian 双向同步：本地笔记 ↔ 律瞳案件</a:t>
+              <a:t>扩展金融判例至 200+（覆盖最高院金融案例库）</a:t>
             </a:r>
           </a:p>
           <a:p>
@@ -8089,7 +8162,7 @@
                 </a:solidFill>
                 <a:latin typeface="Microsoft YaHei"/>
               </a:rPr>
-              <a:t>扩展裁判文书至 100+（覆盖更多法院级别）</a:t>
+              <a:t>增加银保监/证监会处罚案例库（合规自查）</a:t>
             </a:r>
           </a:p>
           <a:p>
@@ -8116,7 +8189,7 @@
                 </a:solidFill>
                 <a:latin typeface="Microsoft YaHei"/>
               </a:rPr>
-              <a:t>多语种支持：英文 / 繁中裁判文书</a:t>
+              <a:t>理财销售合规预审：上传录音+风险评估 → AI 自动判定</a:t>
             </a:r>
           </a:p>
           <a:p>
@@ -8143,7 +8216,7 @@
                 </a:solidFill>
                 <a:latin typeface="Microsoft YaHei"/>
               </a:rPr>
-              <a:t>律所团队协作：案件多人协同、批注、版本管理</a:t>
+              <a:t>对接银行/保险内部系统 API（合规审批流）</a:t>
             </a:r>
           </a:p>
         </p:txBody>
@@ -8389,7 +8462,7 @@
                 </a:solidFill>
                 <a:latin typeface="Microsoft YaHei"/>
               </a:rPr>
-              <a:t>开放 API：与律所 OA / 电子签章 / 案源系统对接</a:t>
+              <a:t>金融 SaaS 商业化：银行版/保险版/券商版/律所版</a:t>
             </a:r>
           </a:p>
           <a:p>
@@ -8416,7 +8489,7 @@
                 </a:solidFill>
                 <a:latin typeface="Microsoft YaHei"/>
               </a:rPr>
-              <a:t>SaaS 商业化：律师版 / 律所版 / 企业法务版分级订阅</a:t>
+              <a:t>开放 API：与银行 OA / 保险核心系统 / 证监平台对接</a:t>
             </a:r>
           </a:p>
           <a:p>
@@ -8443,7 +8516,7 @@
                 </a:solidFill>
                 <a:latin typeface="Microsoft YaHei"/>
               </a:rPr>
-              <a:t>行业拓展：4 Agent 框架复用至医疗、金融、合规</a:t>
+              <a:t>行业拓展：4 Agent 框架复用至医疗、合规、审计</a:t>
             </a:r>
           </a:p>
           <a:p>
@@ -8470,7 +8543,7 @@
                 </a:solidFill>
                 <a:latin typeface="Microsoft YaHei"/>
               </a:rPr>
-              <a:t>生态建设：律所合作、政法高校联合实验室</a:t>
+              <a:t>生态建设：与律师事务所、政法高校、监管机构合作</a:t>
             </a:r>
           </a:p>
         </p:txBody>
@@ -8550,7 +8623,7 @@
                 </a:solidFill>
                 <a:latin typeface="Microsoft YaHei"/>
               </a:rPr>
-              <a:t>从 MVP 验证 → 功能深化 → 规模落地  清晰的 3 阶段路线图</a:t>
+              <a:t>从 MVP 验证 → 金融场景深化 → 规模落地  清晰的 3 阶段路线图</a:t>
             </a:r>
           </a:p>
         </p:txBody>
@@ -8586,7 +8659,7 @@
                 </a:solidFill>
                 <a:latin typeface="Microsoft YaHei"/>
               </a:rPr>
-              <a:t>律瞳 LegalLens · 律师专属的 AI 案件分析平台</a:t>
+              <a:t>律瞳 LegalLens · 律师/金融从业者的 AI 风险研判平台</a:t>
             </a:r>
           </a:p>
         </p:txBody>
@@ -8836,7 +8909,7 @@
                 </a:solidFill>
                 <a:latin typeface="Microsoft YaHei"/>
               </a:rPr>
-              <a:t>律师专属的 AI 案件分析平台</a:t>
+              <a:t>律师 / 金融从业者的 AI 案件分析平台</a:t>
             </a:r>
           </a:p>
         </p:txBody>
@@ -10178,7 +10251,7 @@
                 </a:solidFill>
                 <a:latin typeface="Microsoft YaHei"/>
               </a:rPr>
-              <a:t>律瞳 LegalLens · 律师专属的 AI 案件分析平台</a:t>
+              <a:t>律瞳 LegalLens · 律师/金融从业者的 AI 风险研判平台</a:t>
             </a:r>
           </a:p>
         </p:txBody>
@@ -10384,7 +10457,7 @@
                 </a:solidFill>
                 <a:latin typeface="Microsoft YaHei"/>
               </a:rPr>
-              <a:t>法律工作者的痛点</a:t>
+              <a:t>金融 &amp; 法律工作者的共同痛点</a:t>
             </a:r>
           </a:p>
         </p:txBody>
@@ -10508,7 +10581,7 @@
                 </a:solidFill>
                 <a:latin typeface="Microsoft YaHei"/>
               </a:rPr>
-              <a:t>海量信息</a:t>
+              <a:t>找法/合规难</a:t>
             </a:r>
           </a:p>
         </p:txBody>
@@ -10544,8 +10617,8 @@
                 </a:solidFill>
                 <a:latin typeface="Microsoft YaHei"/>
               </a:rPr>
-              <a:t>法律法规 + 司法解释 +
-类案判例数量巨大</a:t>
+              <a:t>金融法规 + 行业规范 +
+判例政策数量巨大</a:t>
             </a:r>
           </a:p>
         </p:txBody>
@@ -10778,7 +10851,7 @@
                 </a:solidFill>
                 <a:latin typeface="Microsoft YaHei"/>
               </a:rPr>
-              <a:t>律师不敢直接用</a:t>
+              <a:t>律师/客户经理不敢直接用</a:t>
             </a:r>
           </a:p>
         </p:txBody>
@@ -11135,7 +11208,7 @@
                 </a:solidFill>
                 <a:latin typeface="Microsoft YaHei"/>
               </a:rPr>
-              <a:t>律瞳 LegalLens = 多 Agent 协同 + RAG 检索 + 真实法律知识库</a:t>
+              <a:t>律瞳 LegalLens = 多 Agent 协同 + RAG 检索 + 真实法律/金融知识库</a:t>
             </a:r>
           </a:p>
         </p:txBody>
@@ -11171,9 +11244,9 @@
                 </a:solidFill>
                 <a:latin typeface="Microsoft YaHei"/>
               </a:rPr>
-              <a:t>●  RAG 检索: 从 26 部现行法律 + 30 个真实判例库中精准召回
+              <a:t>●  RAG 检索: 从 7 部金融法规 + 26 部法律 + 30 个金融判例 + 30 个法律判例中精准召回
 ●  多 Agent 协同: 4 个独立 Agent 分工 + 互相校验
-●  引用溯源: 每条观点带 [n] 法名 第X条 引用，点开直达官方法律法规库</a:t>
+●  引用溯源: 每条观点带 [n] 法名 第X条 引用，点开直达官方法规/案例库</a:t>
             </a:r>
           </a:p>
         </p:txBody>
@@ -11209,7 +11282,7 @@
                 </a:solidFill>
                 <a:latin typeface="Microsoft YaHei"/>
               </a:rPr>
-              <a:t>律瞳 LegalLens · 律师专属的 AI 案件分析平台</a:t>
+              <a:t>律瞳 LegalLens · 律师/金融从业者的 AI 风险研判平台</a:t>
             </a:r>
           </a:p>
         </p:txBody>
@@ -11860,7 +11933,7 @@
                 <a:latin typeface="Microsoft YaHei"/>
               </a:rPr>
               <a:t>逐字核对每一条 [n] 引用是否真在召回文档中。标"幻觉"的整条观点被自动剔除，并重新计算置信度。
-把 AI 的幻觉率从 ~15% 压到 5% 以下，让律师敢用。</a:t>
+把 AI 的幻觉率从 ~15% 压到 5% 以下，让律师/客户经理敢用。</a:t>
             </a:r>
           </a:p>
         </p:txBody>
@@ -11896,7 +11969,7 @@
                 </a:solidFill>
                 <a:latin typeface="Microsoft YaHei"/>
               </a:rPr>
-              <a:t>律瞳 LegalLens · 律师专属的 AI 案件分析平台</a:t>
+              <a:t>律瞳 LegalLens · 律师/金融从业者的 AI 风险研判平台</a:t>
             </a:r>
           </a:p>
         </p:txBody>
@@ -12162,7 +12235,7 @@
                 </a:solidFill>
                 <a:latin typeface="Microsoft YaHei"/>
               </a:rPr>
-              <a:t>律瞳 LegalLens · 律师专属的 AI 案件分析平台</a:t>
+              <a:t>律瞳 LegalLens · 律师/金融从业者的 AI 风险研判平台</a:t>
             </a:r>
           </a:p>
         </p:txBody>
@@ -12428,7 +12501,7 @@
                 </a:solidFill>
                 <a:latin typeface="Microsoft YaHei"/>
               </a:rPr>
-              <a:t>律瞳 LegalLens · 律师专属的 AI 案件分析平台</a:t>
+              <a:t>律瞳 LegalLens · 律师/金融从业者的 AI 风险研判平台</a:t>
             </a:r>
           </a:p>
         </p:txBody>
@@ -12794,7 +12867,7 @@
                 </a:solidFill>
                 <a:latin typeface="Microsoft YaHei"/>
               </a:rPr>
-              <a:t>案情智能分析</a:t>
+              <a:t>金融案件智能分析</a:t>
             </a:r>
           </a:p>
         </p:txBody>
@@ -12830,7 +12903,7 @@
                 </a:solidFill>
                 <a:latin typeface="Calibri"/>
               </a:rPr>
-              <a:t>Case Analysis</a:t>
+              <a:t>Finance Case Analysis</a:t>
             </a:r>
           </a:p>
         </p:txBody>
@@ -13107,7 +13180,7 @@
                 </a:solidFill>
                 <a:latin typeface="Microsoft YaHei"/>
               </a:rPr>
-              <a:t>类案检索</a:t>
+              <a:t>金融判例检索</a:t>
             </a:r>
           </a:p>
         </p:txBody>
@@ -13179,9 +13252,8 @@
                 </a:solidFill>
                 <a:latin typeface="Microsoft YaHei"/>
               </a:rPr>
-              <a:t>30 个真实判例
-8 大法律领域
-按案由/法院级别筛选</a:t>
+              <a:t>30 个金融判例 + 30 个法律判例
+覆盖借贷/保险/证券/理财</a:t>
             </a:r>
           </a:p>
         </p:txBody>
@@ -13421,7 +13493,7 @@
                 </a:solidFill>
                 <a:latin typeface="Microsoft YaHei"/>
               </a:rPr>
-              <a:t>合同审查</a:t>
+              <a:t>金融合同审查</a:t>
             </a:r>
           </a:p>
         </p:txBody>
@@ -13494,7 +13566,7 @@
                 <a:latin typeface="Microsoft YaHei"/>
               </a:rPr>
               <a:t>10+ 规则引擎
-5 类合同模板
+5 类金融合同模板
 AI 综合分析</a:t>
             </a:r>
           </a:p>
@@ -13735,7 +13807,7 @@
                 </a:solidFill>
                 <a:latin typeface="Microsoft YaHei"/>
               </a:rPr>
-              <a:t>知识库浏览</a:t>
+              <a:t>法规知识库</a:t>
             </a:r>
           </a:p>
         </p:txBody>
@@ -13807,9 +13879,8 @@
                 </a:solidFill>
                 <a:latin typeface="Microsoft YaHei"/>
               </a:rPr>
-              <a:t>26 部现行法律
-官方源 URL
-版本状态一目了然</a:t>
+              <a:t>7 部金融法规 + 26 部法律
+官方源 URL + 状态</a:t>
             </a:r>
           </a:p>
         </p:txBody>
@@ -13925,7 +13996,7 @@
                 </a:solidFill>
                 <a:latin typeface="Microsoft YaHei"/>
               </a:rPr>
-              <a:t>律瞳 LegalLens · 律师专属的 AI 案件分析平台</a:t>
+              <a:t>律瞳 LegalLens · 律师/金融从业者的 AI 风险研判平台</a:t>
             </a:r>
           </a:p>
         </p:txBody>
@@ -14088,14 +14159,14 @@
           <a:p>
             <a:pPr algn="l"/>
             <a:r>
-              <a:rPr sz="2600" b="1">
+              <a:rPr sz="2400" b="1">
                 <a:rFonts a:eastAsia="Microsoft YaHei" a:ascii="Microsoft YaHei" a:hAnsi="Microsoft YaHei"/>
                 <a:solidFill>
                   <a:srgbClr val="0C4A3E"/>
                 </a:solidFill>
                 <a:latin typeface="Microsoft YaHei"/>
               </a:rPr>
-              <a:t>场景 1：律师快速了解案件</a:t>
+              <a:t>场景 1：银行客户经理快速分析金融借款案</a:t>
             </a:r>
           </a:p>
         </p:txBody>
@@ -14131,7 +14202,7 @@
                 </a:solidFill>
                 <a:latin typeface="Calibri"/>
               </a:rPr>
-              <a:t>Scenario 1: Quick Case Triage</a:t>
+              <a:t>Scenario 1: Bank RM · Loan Triage</a:t>
             </a:r>
           </a:p>
         </p:txBody>
@@ -14255,7 +14326,7 @@
                 </a:solidFill>
                 <a:latin typeface="Microsoft YaHei"/>
               </a:rPr>
-              <a:t>👤  李律 · 律师</a:t>
+              <a:t>👤  陈经理 · 某股份制银行客户经理</a:t>
             </a:r>
           </a:p>
         </p:txBody>
@@ -14327,7 +14398,7 @@
                 </a:solidFill>
                 <a:latin typeface="Microsoft YaHei"/>
               </a:rPr>
-              <a:t>新接手一个"公司单方面解除劳动合同"案件，需要在 30 分钟内初步判断胜诉可能性。</a:t>
+              <a:t>客户张某房贷累计 6 期逾期 312 万，需要在 1 小时内评估处置方案（诉讼/重组/转让）。</a:t>
             </a:r>
           </a:p>
         </p:txBody>
@@ -14399,7 +14470,7 @@
                 </a:solidFill>
                 <a:latin typeface="Microsoft YaHei"/>
               </a:rPr>
-              <a:t>在 AI 分析页输入案情 → 律瞳 4 Agent 协同分析 → 60-90 秒后输出</a:t>
+              <a:t>在 AI 分析页输入逾期情况 → 律瞳 4 Agent 协同分析 → 60-90 秒输出</a:t>
             </a:r>
           </a:p>
         </p:txBody>
@@ -14573,7 +14644,7 @@
                 </a:solidFill>
                 <a:latin typeface="Microsoft YaHei"/>
               </a:rPr>
-              <a:t>A1 焦点：本案核心争议为「用人单位单方解除是否符合客观情况发生重大变化」</a:t>
+              <a:t>A1 焦点：本案核心争议为「房贷逾期是否构成根本违约 / 合同解除条件」</a:t>
             </a:r>
           </a:p>
           <a:p>
@@ -14600,7 +14671,7 @@
                 </a:solidFill>
                 <a:latin typeface="Microsoft YaHei"/>
               </a:rPr>
-              <a:t>A2 分析：依据《劳动合同法》第四十条第三项 [1]，应提前三十日书面通知</a:t>
+              <a:t>A2 分析：依据《商业银行法》第 35 条 + 《民法典》第 563 条 [1]，累计 6 期逾期构成根本违约</a:t>
             </a:r>
           </a:p>
           <a:p>
@@ -14627,7 +14698,7 @@
                 </a:solidFill>
                 <a:latin typeface="Microsoft YaHei"/>
               </a:rPr>
-              <a:t>A2 分析：未履行上述程序，构成违法解除 [2]，应支付 2N 赔偿金</a:t>
+              <a:t>A2 分析：依据《民法典》第 565 条 [2]，银行可主张合同解除 + 一次性偿还剩余本息</a:t>
             </a:r>
           </a:p>
           <a:p>
@@ -14654,7 +14725,7 @@
                 </a:solidFill>
                 <a:latin typeface="Microsoft YaHei"/>
               </a:rPr>
-              <a:t>A4 风险：公司败诉概率较高，建议立即申请仲裁</a:t>
+              <a:t>A4 风险：判例库 (2023)京 02 民终 4567 号 [3] 显示类似案件银行胜诉率 95%+</a:t>
             </a:r>
           </a:p>
           <a:p>
@@ -14761,7 +14832,7 @@
                 </a:solidFill>
                 <a:latin typeface="Microsoft YaHei"/>
               </a:rPr>
-              <a:t>💡 效率提升：30 分钟 → 90 秒  （案情初步分析时间）</a:t>
+              <a:t>💡 效率提升：1 小时 → 90 秒  （金融案件初步分析时间）</a:t>
             </a:r>
           </a:p>
         </p:txBody>
@@ -14797,7 +14868,7 @@
                 </a:solidFill>
                 <a:latin typeface="Microsoft YaHei"/>
               </a:rPr>
-              <a:t>律瞳 LegalLens · 律师专属的 AI 案件分析平台</a:t>
+              <a:t>律瞳 LegalLens · 律师/金融从业者的 AI 风险研判平台</a:t>
             </a:r>
           </a:p>
         </p:txBody>
@@ -14960,14 +15031,14 @@
           <a:p>
             <a:pPr algn="l"/>
             <a:r>
-              <a:rPr sz="2600" b="1">
+              <a:rPr sz="2400" b="1">
                 <a:rFonts a:eastAsia="Microsoft YaHei" a:ascii="Microsoft YaHei" a:hAnsi="Microsoft YaHei"/>
                 <a:solidFill>
                   <a:srgbClr val="0C4A3E"/>
                 </a:solidFill>
                 <a:latin typeface="Microsoft YaHei"/>
               </a:rPr>
-              <a:t>场景 2：律师检索类案</a:t>
+              <a:t>场景 2：银行理财合规审查</a:t>
             </a:r>
           </a:p>
         </p:txBody>
@@ -15003,7 +15074,7 @@
                 </a:solidFill>
                 <a:latin typeface="Calibri"/>
               </a:rPr>
-              <a:t>Scenario 2: Case Search</a:t>
+              <a:t>Scenario 2: Wealth Mgmt Compliance Check</a:t>
             </a:r>
           </a:p>
         </p:txBody>
@@ -15127,7 +15198,7 @@
                 </a:solidFill>
                 <a:latin typeface="Microsoft YaHei"/>
               </a:rPr>
-              <a:t>👤  王律 · 律师</a:t>
+              <a:t>👤  李经理 · 某城商行私行部</a:t>
             </a:r>
           </a:p>
         </p:txBody>
@@ -15199,7 +15270,7 @@
                 </a:solidFill>
                 <a:latin typeface="Microsoft YaHei"/>
               </a:rPr>
-              <a:t>正在办一个"网购冰箱有划痕"的消费者维权案，需要找出相似案例作为庭审参考。</a:t>
+              <a:t>客户陈某购买 200 万 R2 级稳健理财亏损 38 万，投诉销售违规。需要快速判定我方责任。</a:t>
             </a:r>
           </a:p>
         </p:txBody>
@@ -15271,7 +15342,7 @@
                 </a:solidFill>
                 <a:latin typeface="Microsoft YaHei"/>
               </a:rPr>
-              <a:t>在类案检索输入案情 → 按"案由：消费者权益"筛选 → 召回 5 个相似判例</a:t>
+              <a:t>上传理财销售录音 + 风险评估记录 → 选「合同类型：理财」+「立场：我方」→ 开始审查</a:t>
             </a:r>
           </a:p>
         </p:txBody>
@@ -15445,7 +15516,7 @@
                 </a:solidFill>
                 <a:latin typeface="Microsoft YaHei"/>
               </a:rPr>
-              <a:t>#1 (2023)京01民终5678号 — 北京一中院 — 80% 匹配</a:t>
+              <a:t>⚠️ 高风险 — 发现 1 个高风险 + 2 个中风险条款</a:t>
             </a:r>
           </a:p>
           <a:p>
@@ -15472,7 +15543,7 @@
                 </a:solidFill>
                 <a:latin typeface="Microsoft YaHei"/>
               </a:rPr>
-              <a:t>  · 引用：消费者权益保护法 第25/24条</a:t>
+              <a:t>AI 综合分析：销售时未做风险评估 / 未充分揭示风险 / 客户风险等级与产品不匹配</a:t>
             </a:r>
           </a:p>
           <a:p>
@@ -15499,7 +15570,7 @@
                 </a:solidFill>
                 <a:latin typeface="Microsoft YaHei"/>
               </a:rPr>
-              <a:t>#2 (2023)京0115民初5566号 — 大兴法院 — 65% 匹配</a:t>
+              <a:t>重点关注：未对客户做 R2 风险承受能力评估 (违反《商业银行理财业务监督管理办法》第 6 条 [1])</a:t>
             </a:r>
           </a:p>
           <a:p>
@@ -15526,7 +15597,7 @@
                 </a:solidFill>
                 <a:latin typeface="Microsoft YaHei"/>
               </a:rPr>
-              <a:t>  · 引用：消费者权益保护法 第8/25/55条</a:t>
+              <a:t>重点关注：合同与销售口头表述不一致 — 合同载「不保本」，销售说「稳健」</a:t>
             </a:r>
           </a:p>
           <a:p>
@@ -15553,34 +15624,7 @@
                 </a:solidFill>
                 <a:latin typeface="Microsoft YaHei"/>
               </a:rPr>
-              <a:t>  + 共 5 个相关判例，按相似度排序</a:t>
-            </a:r>
-          </a:p>
-          <a:p>
-            <a:pPr algn="l">
-              <a:spcAft>
-                <a:spcPts val="800"/>
-              </a:spcAft>
-            </a:pPr>
-            <a:r>
-              <a:rPr sz="1100">
-                <a:rFonts a:eastAsia="Microsoft YaHei"/>
-                <a:solidFill>
-                  <a:srgbClr val="D97706"/>
-                </a:solidFill>
-                <a:latin typeface="Calibri"/>
-              </a:rPr>
-              <a:t>●  </a:t>
-            </a:r>
-            <a:r>
-              <a:rPr sz="1100">
-                <a:rFonts a:eastAsia="Microsoft YaHei"/>
-                <a:solidFill>
-                  <a:srgbClr val="44403C"/>
-                </a:solidFill>
-                <a:latin typeface="Microsoft YaHei"/>
-              </a:rPr>
-              <a:t>  + 案号、法院、引用法条全部标注</a:t>
+              <a:t>类案参考：(2023)京 03 民终 1234 号 [2] 银行被判赔 38 万的 20%</a:t>
             </a:r>
           </a:p>
         </p:txBody>
@@ -15660,7 +15704,7 @@
                 </a:solidFill>
                 <a:latin typeface="Microsoft YaHei"/>
               </a:rPr>
-              <a:t>💡 效率提升：几小时 → 几秒  （类案检索时间）</a:t>
+              <a:t>💡 效率提升：1 天 → 30 秒  （理财合规审查时间）</a:t>
             </a:r>
           </a:p>
         </p:txBody>
@@ -15696,7 +15740,7 @@
                 </a:solidFill>
                 <a:latin typeface="Microsoft YaHei"/>
               </a:rPr>
-              <a:t>律瞳 LegalLens · 律师专属的 AI 案件分析平台</a:t>
+              <a:t>律瞳 LegalLens · 律师/金融从业者的 AI 风险研判平台</a:t>
             </a:r>
           </a:p>
         </p:txBody>
